--- a/KHBD_Tin_học/Lớp_8/Tuần_02/Slide_Tin_hoc_Lop_8_Bai01_Luoc_su_cong_cu_tinh_toan.pptx
+++ b/KHBD_Tin_học/Lớp_8/Tuần_02/Slide_Tin_hoc_Lop_8_Bai01_Luoc_su_cong_cu_tinh_toan.pptx
@@ -3389,6 +3389,12 @@
 <p:sld xmlns:a="http://schemas.openxmlformats.org/drawingml/2006/main" xmlns:p="http://schemas.openxmlformats.org/presentationml/2006/main" xmlns:r="http://schemas.openxmlformats.org/officeDocument/2006/relationships">
   <p:cSld>
     <p:spTree>
+      <p:nvGrpSpPr>
+        <p:cNvPr id="1" name=""/>
+        <p:cNvGrpSpPr/>
+        <p:nvPr/>
+      </p:nvGrpSpPr>
+      <p:grpSpPr/>
       <p:sp>
         <p:nvSpPr>
           <p:cNvPr id="3" name="Rectangle 2"/>
@@ -3475,12 +3481,6 @@
           </a:p>
         </p:txBody>
       </p:sp>
-      <p:nvGrpSpPr>
-        <p:cNvPr id="1" name=""/>
-        <p:cNvGrpSpPr/>
-        <p:nvPr/>
-      </p:nvGrpSpPr>
-      <p:grpSpPr/>
       <p:sp>
         <p:nvSpPr>
           <p:cNvPr id="4" name="TextBox 3"/>
@@ -3590,6 +3590,12 @@
 <p:sld xmlns:a="http://schemas.openxmlformats.org/drawingml/2006/main" xmlns:p="http://schemas.openxmlformats.org/presentationml/2006/main" xmlns:r="http://schemas.openxmlformats.org/officeDocument/2006/relationships">
   <p:cSld>
     <p:spTree>
+      <p:nvGrpSpPr>
+        <p:cNvPr id="1" name=""/>
+        <p:cNvGrpSpPr/>
+        <p:nvPr/>
+      </p:nvGrpSpPr>
+      <p:grpSpPr/>
       <p:sp>
         <p:nvSpPr>
           <p:cNvPr id="2" name="Rectangle 1"/>
@@ -3633,12 +3639,6 @@
           </a:p>
         </p:txBody>
       </p:sp>
-      <p:nvGrpSpPr>
-        <p:cNvPr id="1" name=""/>
-        <p:cNvGrpSpPr/>
-        <p:nvPr/>
-      </p:nvGrpSpPr>
-      <p:grpSpPr/>
       <p:sp>
         <p:nvSpPr>
           <p:cNvPr id="3" name="Rectangle 2"/>
@@ -3996,6 +3996,12 @@
 <p:sld xmlns:a="http://schemas.openxmlformats.org/drawingml/2006/main" xmlns:p="http://schemas.openxmlformats.org/presentationml/2006/main" xmlns:r="http://schemas.openxmlformats.org/officeDocument/2006/relationships">
   <p:cSld>
     <p:spTree>
+      <p:nvGrpSpPr>
+        <p:cNvPr id="1" name=""/>
+        <p:cNvGrpSpPr/>
+        <p:nvPr/>
+      </p:nvGrpSpPr>
+      <p:grpSpPr/>
       <p:sp>
         <p:nvSpPr>
           <p:cNvPr id="2" name="Rectangle 1"/>
@@ -4039,12 +4045,6 @@
           </a:p>
         </p:txBody>
       </p:sp>
-      <p:nvGrpSpPr>
-        <p:cNvPr id="1" name=""/>
-        <p:cNvGrpSpPr/>
-        <p:nvPr/>
-      </p:nvGrpSpPr>
-      <p:grpSpPr/>
       <p:sp>
         <p:nvSpPr>
           <p:cNvPr id="3" name="Rectangle 2"/>
@@ -4402,6 +4402,12 @@
 <p:sld xmlns:a="http://schemas.openxmlformats.org/drawingml/2006/main" xmlns:p="http://schemas.openxmlformats.org/presentationml/2006/main" xmlns:r="http://schemas.openxmlformats.org/officeDocument/2006/relationships">
   <p:cSld>
     <p:spTree>
+      <p:nvGrpSpPr>
+        <p:cNvPr id="1" name=""/>
+        <p:cNvGrpSpPr/>
+        <p:nvPr/>
+      </p:nvGrpSpPr>
+      <p:grpSpPr/>
       <p:sp>
         <p:nvSpPr>
           <p:cNvPr id="2" name="Rectangle 1"/>
@@ -4445,12 +4451,6 @@
           </a:p>
         </p:txBody>
       </p:sp>
-      <p:nvGrpSpPr>
-        <p:cNvPr id="1" name=""/>
-        <p:cNvGrpSpPr/>
-        <p:nvPr/>
-      </p:nvGrpSpPr>
-      <p:grpSpPr/>
       <p:sp>
         <p:nvSpPr>
           <p:cNvPr id="3" name="Rectangle 2"/>
@@ -4792,6 +4792,12 @@
 <p:sld xmlns:a="http://schemas.openxmlformats.org/drawingml/2006/main" xmlns:p="http://schemas.openxmlformats.org/presentationml/2006/main" xmlns:r="http://schemas.openxmlformats.org/officeDocument/2006/relationships">
   <p:cSld>
     <p:spTree>
+      <p:nvGrpSpPr>
+        <p:cNvPr id="1" name=""/>
+        <p:cNvGrpSpPr/>
+        <p:nvPr/>
+      </p:nvGrpSpPr>
+      <p:grpSpPr/>
       <p:sp>
         <p:nvSpPr>
           <p:cNvPr id="2" name="Rectangle 1"/>
@@ -4835,12 +4841,6 @@
           </a:p>
         </p:txBody>
       </p:sp>
-      <p:nvGrpSpPr>
-        <p:cNvPr id="1" name=""/>
-        <p:cNvGrpSpPr/>
-        <p:nvPr/>
-      </p:nvGrpSpPr>
-      <p:grpSpPr/>
       <p:sp>
         <p:nvSpPr>
           <p:cNvPr id="3" name="Rectangle 2"/>
@@ -5182,6 +5182,12 @@
 <p:sld xmlns:a="http://schemas.openxmlformats.org/drawingml/2006/main" xmlns:p="http://schemas.openxmlformats.org/presentationml/2006/main" xmlns:r="http://schemas.openxmlformats.org/officeDocument/2006/relationships">
   <p:cSld>
     <p:spTree>
+      <p:nvGrpSpPr>
+        <p:cNvPr id="1" name=""/>
+        <p:cNvGrpSpPr/>
+        <p:nvPr/>
+      </p:nvGrpSpPr>
+      <p:grpSpPr/>
       <p:sp>
         <p:nvSpPr>
           <p:cNvPr id="2" name="Rectangle 1"/>
@@ -5225,12 +5231,6 @@
           </a:p>
         </p:txBody>
       </p:sp>
-      <p:nvGrpSpPr>
-        <p:cNvPr id="1" name=""/>
-        <p:cNvGrpSpPr/>
-        <p:nvPr/>
-      </p:nvGrpSpPr>
-      <p:grpSpPr/>
       <p:sp>
         <p:nvSpPr>
           <p:cNvPr id="3" name="Rectangle 2"/>
@@ -5798,6 +5798,12 @@
 <p:sld xmlns:a="http://schemas.openxmlformats.org/drawingml/2006/main" xmlns:p="http://schemas.openxmlformats.org/presentationml/2006/main" xmlns:r="http://schemas.openxmlformats.org/officeDocument/2006/relationships">
   <p:cSld>
     <p:spTree>
+      <p:nvGrpSpPr>
+        <p:cNvPr id="1" name=""/>
+        <p:cNvGrpSpPr/>
+        <p:nvPr/>
+      </p:nvGrpSpPr>
+      <p:grpSpPr/>
       <p:sp>
         <p:nvSpPr>
           <p:cNvPr id="2" name="Rectangle 1"/>
@@ -5841,12 +5847,6 @@
           </a:p>
         </p:txBody>
       </p:sp>
-      <p:nvGrpSpPr>
-        <p:cNvPr id="1" name=""/>
-        <p:cNvGrpSpPr/>
-        <p:nvPr/>
-      </p:nvGrpSpPr>
-      <p:grpSpPr/>
       <p:sp>
         <p:nvSpPr>
           <p:cNvPr id="3" name="Rectangle 2"/>
@@ -6110,6 +6110,12 @@
 <p:sld xmlns:a="http://schemas.openxmlformats.org/drawingml/2006/main" xmlns:p="http://schemas.openxmlformats.org/presentationml/2006/main" xmlns:r="http://schemas.openxmlformats.org/officeDocument/2006/relationships">
   <p:cSld>
     <p:spTree>
+      <p:nvGrpSpPr>
+        <p:cNvPr id="1" name=""/>
+        <p:cNvGrpSpPr/>
+        <p:nvPr/>
+      </p:nvGrpSpPr>
+      <p:grpSpPr/>
       <p:sp>
         <p:nvSpPr>
           <p:cNvPr id="2" name="Rectangle 1"/>
@@ -6153,12 +6159,6 @@
           </a:p>
         </p:txBody>
       </p:sp>
-      <p:nvGrpSpPr>
-        <p:cNvPr id="1" name=""/>
-        <p:cNvGrpSpPr/>
-        <p:nvPr/>
-      </p:nvGrpSpPr>
-      <p:grpSpPr/>
       <p:sp>
         <p:nvSpPr>
           <p:cNvPr id="3" name="Rounded Rectangle 2"/>
@@ -6701,6 +6701,12 @@
 <p:sld xmlns:a="http://schemas.openxmlformats.org/drawingml/2006/main" xmlns:p="http://schemas.openxmlformats.org/presentationml/2006/main" xmlns:r="http://schemas.openxmlformats.org/officeDocument/2006/relationships">
   <p:cSld>
     <p:spTree>
+      <p:nvGrpSpPr>
+        <p:cNvPr id="1" name=""/>
+        <p:cNvGrpSpPr/>
+        <p:nvPr/>
+      </p:nvGrpSpPr>
+      <p:grpSpPr/>
       <p:sp>
         <p:nvSpPr>
           <p:cNvPr id="2" name="Rectangle 1"/>
@@ -6744,12 +6750,6 @@
           </a:p>
         </p:txBody>
       </p:sp>
-      <p:nvGrpSpPr>
-        <p:cNvPr id="1" name=""/>
-        <p:cNvGrpSpPr/>
-        <p:nvPr/>
-      </p:nvGrpSpPr>
-      <p:grpSpPr/>
       <p:sp>
         <p:nvSpPr>
           <p:cNvPr id="3" name="TextBox 2"/>

--- a/KHBD_Tin_học/Lớp_8/Tuần_02/Slide_Tin_hoc_Lop_8_Bai01_Luoc_su_cong_cu_tinh_toan.pptx
+++ b/KHBD_Tin_học/Lớp_8/Tuần_02/Slide_Tin_hoc_Lop_8_Bai01_Luoc_su_cong_cu_tinh_toan.pptx
@@ -3489,8 +3489,8 @@
         </p:nvSpPr>
         <p:spPr>
           <a:xfrm>
-            <a:off x="1371600" y="2011680"/>
-            <a:ext cx="9445752" cy="1371600"/>
+            <a:off x="731520" y="1828800"/>
+            <a:ext cx="6858000" cy="1371600"/>
           </a:xfrm>
           <a:prstGeom prst="rect">
             <a:avLst/>
@@ -3503,9 +3503,9 @@
           </a:bodyPr>
           <a:lstStyle/>
           <a:p>
-            <a:pPr algn="ctr"/>
-            <a:r>
-              <a:rPr sz="3600" b="1">
+            <a:pPr algn="l"/>
+            <a:r>
+              <a:rPr sz="3400" b="1">
                 <a:solidFill>
                   <a:srgbClr val="FFFFFF"/>
                 </a:solidFill>
@@ -3524,8 +3524,8 @@
         </p:nvSpPr>
         <p:spPr>
           <a:xfrm>
-            <a:off x="1371600" y="3657600"/>
-            <a:ext cx="9445752" cy="731520"/>
+            <a:off x="731520" y="3474720"/>
+            <a:ext cx="6858000" cy="731520"/>
           </a:xfrm>
           <a:prstGeom prst="rect">
             <a:avLst/>
@@ -3538,7 +3538,7 @@
           </a:bodyPr>
           <a:lstStyle/>
           <a:p>
-            <a:pPr algn="ctr"/>
+            <a:pPr algn="l"/>
             <a:r>
               <a:rPr sz="2000" b="0">
                 <a:solidFill>
@@ -3726,7 +3726,7 @@
         <p:spPr>
           <a:xfrm>
             <a:off x="457200" y="1600200"/>
-            <a:ext cx="11274552" cy="594360"/>
+            <a:ext cx="7315200" cy="594360"/>
           </a:xfrm>
           <a:prstGeom prst="rect">
             <a:avLst/>
@@ -3846,8 +3846,8 @@
         </p:nvSpPr>
         <p:spPr>
           <a:xfrm>
-            <a:off x="731520" y="2423160"/>
-            <a:ext cx="6309360" cy="3108960"/>
+            <a:off x="731520" y="2468880"/>
+            <a:ext cx="6309360" cy="3017520"/>
           </a:xfrm>
           <a:prstGeom prst="rect">
             <a:avLst/>
@@ -3866,13 +3866,13 @@
               </a:spcAft>
             </a:pPr>
             <a:r>
-              <a:rPr sz="1800" b="0">
+              <a:rPr sz="2000" b="0">
                 <a:solidFill>
                   <a:srgbClr val="451A03"/>
                 </a:solidFill>
                 <a:latin typeface="Arial"/>
               </a:rPr>
-              <a:t>Hãy nhìn 2 hình ảnh:</a:t>
+              <a:t>So sánh hai hình ảnh:</a:t>
             </a:r>
           </a:p>
           <a:p>
@@ -3882,7 +3882,7 @@
               </a:spcAft>
             </a:pPr>
             <a:r>
-              <a:rPr sz="1800" b="0">
+              <a:rPr sz="2000" b="0">
                 <a:solidFill>
                   <a:srgbClr val="451A03"/>
                 </a:solidFill>
@@ -3898,13 +3898,13 @@
               </a:spcAft>
             </a:pPr>
             <a:r>
-              <a:rPr sz="1800" b="0">
+              <a:rPr sz="2000" b="0">
                 <a:solidFill>
                   <a:srgbClr val="451A03"/>
                 </a:solidFill>
                 <a:latin typeface="Arial"/>
               </a:rPr>
-              <a:t>● Siêu máy tính hiện đại</a:t>
+              <a:t>● Siêu máy tính hiện đại ngày nay</a:t>
             </a:r>
           </a:p>
           <a:p>
@@ -3914,45 +3914,13 @@
               </a:spcAft>
             </a:pPr>
             <a:r>
-              <a:rPr sz="1800" b="0">
+              <a:rPr sz="2000" b="0">
                 <a:solidFill>
                   <a:srgbClr val="451A03"/>
                 </a:solidFill>
                 <a:latin typeface="Arial"/>
               </a:rPr>
-              <a:t/>
-            </a:r>
-          </a:p>
-          <a:p>
-            <a:pPr algn="l">
-              <a:spcAft>
-                <a:spcPts val="600"/>
-              </a:spcAft>
-            </a:pPr>
-            <a:r>
-              <a:rPr sz="1800" b="0">
-                <a:solidFill>
-                  <a:srgbClr val="451A03"/>
-                </a:solidFill>
-                <a:latin typeface="Arial"/>
-              </a:rPr>
-              <a:t>Có điểm gì GIỐNG và KHÁC nhau?</a:t>
-            </a:r>
-          </a:p>
-          <a:p>
-            <a:pPr algn="l">
-              <a:spcAft>
-                <a:spcPts val="600"/>
-              </a:spcAft>
-            </a:pPr>
-            <a:r>
-              <a:rPr sz="1800" b="0">
-                <a:solidFill>
-                  <a:srgbClr val="451A03"/>
-                </a:solidFill>
-                <a:latin typeface="Arial"/>
-              </a:rPr>
-              <a:t>2 phút thảo luận cặp đôi</a:t>
+              <a:t>Điểm giống và khác nhau cốt lõi là gì?</a:t>
             </a:r>
           </a:p>
         </p:txBody>
@@ -4153,7 +4121,7 @@
                 </a:solidFill>
                 <a:latin typeface="Arial"/>
               </a:rPr>
-              <a:t>Hành trình từ Abacus đến AI</a:t>
+              <a:t>Từ bàn tính cổ đại đến máy tính cơ học</a:t>
             </a:r>
           </a:p>
         </p:txBody>
@@ -4166,8 +4134,8 @@
         </p:nvSpPr>
         <p:spPr>
           <a:xfrm>
-            <a:off x="365760" y="2286000"/>
-            <a:ext cx="6858000" cy="3383279"/>
+            <a:off x="457200" y="2331720"/>
+            <a:ext cx="11274552" cy="1005839"/>
           </a:xfrm>
           <a:prstGeom prst="roundRect">
             <a:avLst/>
@@ -4175,8 +4143,10 @@
           <a:solidFill>
             <a:srgbClr val="FFFFFF"/>
           </a:solidFill>
-          <a:ln>
-            <a:noFill/>
+          <a:ln w="12700">
+            <a:solidFill>
+              <a:srgbClr val="D0D5DD"/>
+            </a:solidFill>
           </a:ln>
         </p:spPr>
         <p:style>
@@ -4209,8 +4179,8 @@
         </p:nvSpPr>
         <p:spPr>
           <a:xfrm>
-            <a:off x="365760" y="2286000"/>
-            <a:ext cx="109728" cy="3383279"/>
+            <a:off x="457200" y="2331720"/>
+            <a:ext cx="109728" cy="1005839"/>
           </a:xfrm>
           <a:prstGeom prst="rect">
             <a:avLst/>
@@ -4244,128 +4214,9 @@
           </a:p>
         </p:txBody>
       </p:sp>
-      <p:sp>
-        <p:nvSpPr>
-          <p:cNvPr id="8" name="TextBox 7"/>
-          <p:cNvSpPr txBox="1"/>
-          <p:nvPr/>
-        </p:nvSpPr>
-        <p:spPr>
-          <a:xfrm>
-            <a:off x="731520" y="2423160"/>
-            <a:ext cx="6309360" cy="3108960"/>
-          </a:xfrm>
-          <a:prstGeom prst="rect">
-            <a:avLst/>
-          </a:prstGeom>
-          <a:noFill/>
-        </p:spPr>
-        <p:txBody>
-          <a:bodyPr wrap="square">
-            <a:spAutoFit/>
-          </a:bodyPr>
-          <a:lstStyle/>
-          <a:p>
-            <a:pPr algn="l">
-              <a:spcAft>
-                <a:spcPts val="600"/>
-              </a:spcAft>
-            </a:pPr>
-            <a:r>
-              <a:rPr sz="1800" b="0">
-                <a:solidFill>
-                  <a:srgbClr val="451A03"/>
-                </a:solidFill>
-                <a:latin typeface="Arial"/>
-              </a:rPr>
-              <a:t>Dòng thời gian lược sử:</a:t>
-            </a:r>
-          </a:p>
-          <a:p>
-            <a:pPr algn="l">
-              <a:spcAft>
-                <a:spcPts val="600"/>
-              </a:spcAft>
-            </a:pPr>
-            <a:r>
-              <a:rPr sz="1800" b="0">
-                <a:solidFill>
-                  <a:srgbClr val="451A03"/>
-                </a:solidFill>
-                <a:latin typeface="Arial"/>
-              </a:rPr>
-              <a:t>● ~2400 TCN — Bàn tính Abacus (Lưỡng Hà)</a:t>
-            </a:r>
-          </a:p>
-          <a:p>
-            <a:pPr algn="l">
-              <a:spcAft>
-                <a:spcPts val="600"/>
-              </a:spcAft>
-            </a:pPr>
-            <a:r>
-              <a:rPr sz="1800" b="0">
-                <a:solidFill>
-                  <a:srgbClr val="451A03"/>
-                </a:solidFill>
-                <a:latin typeface="Arial"/>
-              </a:rPr>
-              <a:t>● 1642 — Máy Pascaline (Blaise Pascal)</a:t>
-            </a:r>
-          </a:p>
-          <a:p>
-            <a:pPr algn="l">
-              <a:spcAft>
-                <a:spcPts val="600"/>
-              </a:spcAft>
-            </a:pPr>
-            <a:r>
-              <a:rPr sz="1800" b="0">
-                <a:solidFill>
-                  <a:srgbClr val="451A03"/>
-                </a:solidFill>
-                <a:latin typeface="Arial"/>
-              </a:rPr>
-              <a:t>● 1834 — Máy phân tích (Charles Babbage)</a:t>
-            </a:r>
-          </a:p>
-          <a:p>
-            <a:pPr algn="l">
-              <a:spcAft>
-                <a:spcPts val="600"/>
-              </a:spcAft>
-            </a:pPr>
-            <a:r>
-              <a:rPr sz="1800" b="0">
-                <a:solidFill>
-                  <a:srgbClr val="451A03"/>
-                </a:solidFill>
-                <a:latin typeface="Arial"/>
-              </a:rPr>
-              <a:t>● 1946 — ENIAC (máy tính điện tử đầu tiên)</a:t>
-            </a:r>
-          </a:p>
-          <a:p>
-            <a:pPr algn="l">
-              <a:spcAft>
-                <a:spcPts val="600"/>
-              </a:spcAft>
-            </a:pPr>
-            <a:r>
-              <a:rPr sz="1800" b="0">
-                <a:solidFill>
-                  <a:srgbClr val="451A03"/>
-                </a:solidFill>
-                <a:latin typeface="Arial"/>
-              </a:rPr>
-              <a:t>● 1971 — Microprocessor (Intel 4004)</a:t>
-            </a:r>
-          </a:p>
-        </p:txBody>
-      </p:sp>
       <p:pic>
         <p:nvPicPr>
-          <p:cNvPr id="9" name="Picture 8" descr="bai1_page11.png"/>
+          <p:cNvPr id="8" name="Picture 7" descr="bai1_page10.png"/>
           <p:cNvPicPr>
             <a:picLocks noChangeAspect="1"/>
           </p:cNvPicPr>
@@ -4379,21 +4230,350 @@
         </p:blipFill>
         <p:spPr>
           <a:xfrm>
-            <a:off x="7589520" y="2286000"/>
-            <a:ext cx="4114799" cy="3383279"/>
+            <a:off x="731520" y="2423160"/>
+            <a:ext cx="1645920" cy="822959"/>
           </a:xfrm>
           <a:prstGeom prst="rect">
             <a:avLst/>
           </a:prstGeom>
         </p:spPr>
       </p:pic>
+      <p:sp>
+        <p:nvSpPr>
+          <p:cNvPr id="9" name="TextBox 8"/>
+          <p:cNvSpPr txBox="1"/>
+          <p:nvPr/>
+        </p:nvSpPr>
+        <p:spPr>
+          <a:xfrm>
+            <a:off x="2651760" y="2468879"/>
+            <a:ext cx="8897112" cy="731519"/>
+          </a:xfrm>
+          <a:prstGeom prst="rect">
+            <a:avLst/>
+          </a:prstGeom>
+          <a:noFill/>
+        </p:spPr>
+        <p:txBody>
+          <a:bodyPr wrap="square">
+            <a:spAutoFit/>
+          </a:bodyPr>
+          <a:lstStyle/>
+          <a:p>
+            <a:pPr algn="l"/>
+            <a:r>
+              <a:rPr sz="1700" b="0">
+                <a:solidFill>
+                  <a:srgbClr val="451A03"/>
+                </a:solidFill>
+                <a:latin typeface="Arial"/>
+              </a:rPr>
+              <a:t>● Bàn tính Abacus (~2400 TCN) — công cụ tính toán đầu tiên</a:t>
+            </a:r>
+          </a:p>
+        </p:txBody>
+      </p:sp>
+      <p:sp>
+        <p:nvSpPr>
+          <p:cNvPr id="10" name="Rounded Rectangle 9"/>
+          <p:cNvSpPr/>
+          <p:nvPr/>
+        </p:nvSpPr>
+        <p:spPr>
+          <a:xfrm>
+            <a:off x="457200" y="3520439"/>
+            <a:ext cx="11274552" cy="1005839"/>
+          </a:xfrm>
+          <a:prstGeom prst="roundRect">
+            <a:avLst/>
+          </a:prstGeom>
+          <a:solidFill>
+            <a:srgbClr val="FFFFFF"/>
+          </a:solidFill>
+          <a:ln w="12700">
+            <a:solidFill>
+              <a:srgbClr val="D0D5DD"/>
+            </a:solidFill>
+          </a:ln>
+        </p:spPr>
+        <p:style>
+          <a:lnRef idx="1">
+            <a:schemeClr val="accent1"/>
+          </a:lnRef>
+          <a:fillRef idx="3">
+            <a:schemeClr val="accent1"/>
+          </a:fillRef>
+          <a:effectRef idx="2">
+            <a:schemeClr val="accent1"/>
+          </a:effectRef>
+          <a:fontRef idx="minor">
+            <a:schemeClr val="lt1"/>
+          </a:fontRef>
+        </p:style>
+        <p:txBody>
+          <a:bodyPr rtlCol="0" anchor="ctr"/>
+          <a:lstStyle/>
+          <a:p>
+            <a:pPr algn="ctr"/>
+          </a:p>
+        </p:txBody>
+      </p:sp>
+      <p:sp>
+        <p:nvSpPr>
+          <p:cNvPr id="11" name="Rectangle 10"/>
+          <p:cNvSpPr/>
+          <p:nvPr/>
+        </p:nvSpPr>
+        <p:spPr>
+          <a:xfrm>
+            <a:off x="457200" y="3520439"/>
+            <a:ext cx="109728" cy="1005839"/>
+          </a:xfrm>
+          <a:prstGeom prst="rect">
+            <a:avLst/>
+          </a:prstGeom>
+          <a:solidFill>
+            <a:srgbClr val="F59E0B"/>
+          </a:solidFill>
+          <a:ln>
+            <a:noFill/>
+          </a:ln>
+        </p:spPr>
+        <p:style>
+          <a:lnRef idx="1">
+            <a:schemeClr val="accent1"/>
+          </a:lnRef>
+          <a:fillRef idx="3">
+            <a:schemeClr val="accent1"/>
+          </a:fillRef>
+          <a:effectRef idx="2">
+            <a:schemeClr val="accent1"/>
+          </a:effectRef>
+          <a:fontRef idx="minor">
+            <a:schemeClr val="lt1"/>
+          </a:fontRef>
+        </p:style>
+        <p:txBody>
+          <a:bodyPr rtlCol="0" anchor="ctr"/>
+          <a:lstStyle/>
+          <a:p>
+            <a:pPr algn="ctr"/>
+          </a:p>
+        </p:txBody>
+      </p:sp>
+      <p:pic>
+        <p:nvPicPr>
+          <p:cNvPr id="12" name="Picture 11" descr="bai1_page11.png"/>
+          <p:cNvPicPr>
+            <a:picLocks noChangeAspect="1"/>
+          </p:cNvPicPr>
+          <p:nvPr/>
+        </p:nvPicPr>
+        <p:blipFill>
+          <a:blip r:embed="rId3"/>
+          <a:stretch>
+            <a:fillRect/>
+          </a:stretch>
+        </p:blipFill>
+        <p:spPr>
+          <a:xfrm>
+            <a:off x="731520" y="3611879"/>
+            <a:ext cx="1645920" cy="822959"/>
+          </a:xfrm>
+          <a:prstGeom prst="rect">
+            <a:avLst/>
+          </a:prstGeom>
+        </p:spPr>
+      </p:pic>
+      <p:sp>
+        <p:nvSpPr>
+          <p:cNvPr id="13" name="TextBox 12"/>
+          <p:cNvSpPr txBox="1"/>
+          <p:nvPr/>
+        </p:nvSpPr>
+        <p:spPr>
+          <a:xfrm>
+            <a:off x="2651760" y="3657599"/>
+            <a:ext cx="8897112" cy="731519"/>
+          </a:xfrm>
+          <a:prstGeom prst="rect">
+            <a:avLst/>
+          </a:prstGeom>
+          <a:noFill/>
+        </p:spPr>
+        <p:txBody>
+          <a:bodyPr wrap="square">
+            <a:spAutoFit/>
+          </a:bodyPr>
+          <a:lstStyle/>
+          <a:p>
+            <a:pPr algn="l"/>
+            <a:r>
+              <a:rPr sz="1700" b="0">
+                <a:solidFill>
+                  <a:srgbClr val="451A03"/>
+                </a:solidFill>
+                <a:latin typeface="Arial"/>
+              </a:rPr>
+              <a:t>● Máy tính Pascaline (1642 - Blaise Pascal) — máy tính cơ học dùng bánh răng</a:t>
+            </a:r>
+          </a:p>
+        </p:txBody>
+      </p:sp>
+      <p:sp>
+        <p:nvSpPr>
+          <p:cNvPr id="14" name="Rounded Rectangle 13"/>
+          <p:cNvSpPr/>
+          <p:nvPr/>
+        </p:nvSpPr>
+        <p:spPr>
+          <a:xfrm>
+            <a:off x="457200" y="4709159"/>
+            <a:ext cx="11274552" cy="1005839"/>
+          </a:xfrm>
+          <a:prstGeom prst="roundRect">
+            <a:avLst/>
+          </a:prstGeom>
+          <a:solidFill>
+            <a:srgbClr val="FFFFFF"/>
+          </a:solidFill>
+          <a:ln w="12700">
+            <a:solidFill>
+              <a:srgbClr val="D0D5DD"/>
+            </a:solidFill>
+          </a:ln>
+        </p:spPr>
+        <p:style>
+          <a:lnRef idx="1">
+            <a:schemeClr val="accent1"/>
+          </a:lnRef>
+          <a:fillRef idx="3">
+            <a:schemeClr val="accent1"/>
+          </a:fillRef>
+          <a:effectRef idx="2">
+            <a:schemeClr val="accent1"/>
+          </a:effectRef>
+          <a:fontRef idx="minor">
+            <a:schemeClr val="lt1"/>
+          </a:fontRef>
+        </p:style>
+        <p:txBody>
+          <a:bodyPr rtlCol="0" anchor="ctr"/>
+          <a:lstStyle/>
+          <a:p>
+            <a:pPr algn="ctr"/>
+          </a:p>
+        </p:txBody>
+      </p:sp>
+      <p:sp>
+        <p:nvSpPr>
+          <p:cNvPr id="15" name="Rectangle 14"/>
+          <p:cNvSpPr/>
+          <p:nvPr/>
+        </p:nvSpPr>
+        <p:spPr>
+          <a:xfrm>
+            <a:off x="457200" y="4709159"/>
+            <a:ext cx="109728" cy="1005839"/>
+          </a:xfrm>
+          <a:prstGeom prst="rect">
+            <a:avLst/>
+          </a:prstGeom>
+          <a:solidFill>
+            <a:srgbClr val="F59E0B"/>
+          </a:solidFill>
+          <a:ln>
+            <a:noFill/>
+          </a:ln>
+        </p:spPr>
+        <p:style>
+          <a:lnRef idx="1">
+            <a:schemeClr val="accent1"/>
+          </a:lnRef>
+          <a:fillRef idx="3">
+            <a:schemeClr val="accent1"/>
+          </a:fillRef>
+          <a:effectRef idx="2">
+            <a:schemeClr val="accent1"/>
+          </a:effectRef>
+          <a:fontRef idx="minor">
+            <a:schemeClr val="lt1"/>
+          </a:fontRef>
+        </p:style>
+        <p:txBody>
+          <a:bodyPr rtlCol="0" anchor="ctr"/>
+          <a:lstStyle/>
+          <a:p>
+            <a:pPr algn="ctr"/>
+          </a:p>
+        </p:txBody>
+      </p:sp>
+      <p:pic>
+        <p:nvPicPr>
+          <p:cNvPr id="16" name="Picture 15" descr="bai1_page12.png"/>
+          <p:cNvPicPr>
+            <a:picLocks noChangeAspect="1"/>
+          </p:cNvPicPr>
+          <p:nvPr/>
+        </p:nvPicPr>
+        <p:blipFill>
+          <a:blip r:embed="rId4"/>
+          <a:stretch>
+            <a:fillRect/>
+          </a:stretch>
+        </p:blipFill>
+        <p:spPr>
+          <a:xfrm>
+            <a:off x="731520" y="4800599"/>
+            <a:ext cx="1645920" cy="822959"/>
+          </a:xfrm>
+          <a:prstGeom prst="rect">
+            <a:avLst/>
+          </a:prstGeom>
+        </p:spPr>
+      </p:pic>
+      <p:sp>
+        <p:nvSpPr>
+          <p:cNvPr id="17" name="TextBox 16"/>
+          <p:cNvSpPr txBox="1"/>
+          <p:nvPr/>
+        </p:nvSpPr>
+        <p:spPr>
+          <a:xfrm>
+            <a:off x="2651760" y="4846320"/>
+            <a:ext cx="8897112" cy="731519"/>
+          </a:xfrm>
+          <a:prstGeom prst="rect">
+            <a:avLst/>
+          </a:prstGeom>
+          <a:noFill/>
+        </p:spPr>
+        <p:txBody>
+          <a:bodyPr wrap="square">
+            <a:spAutoFit/>
+          </a:bodyPr>
+          <a:lstStyle/>
+          <a:p>
+            <a:pPr algn="l"/>
+            <a:r>
+              <a:rPr sz="1700" b="0">
+                <a:solidFill>
+                  <a:srgbClr val="451A03"/>
+                </a:solidFill>
+                <a:latin typeface="Arial"/>
+              </a:rPr>
+              <a:t>● Máy phân tích (1834 - Charles Babbage) — ý tưởng máy tính tự động đầu tiên</a:t>
+            </a:r>
+          </a:p>
+        </p:txBody>
+      </p:sp>
     </p:spTree>
   </p:cSld>
   <p:clrMapOvr>
     <a:masterClrMapping/>
   </p:clrMapOvr>
   <p:transition spd="med">
-    <p:push dir="l"/>
+    <p:wipe/>
   </p:transition>
 </p:sld>
 </file>
@@ -4559,7 +4739,7 @@
                 </a:solidFill>
                 <a:latin typeface="Arial"/>
               </a:rPr>
-              <a:t>5 thế hệ máy tính</a:t>
+              <a:t>Kỷ nguyên máy tính điện tử (ENIAC -&gt; PC)</a:t>
             </a:r>
           </a:p>
         </p:txBody>
@@ -4572,8 +4752,8 @@
         </p:nvSpPr>
         <p:spPr>
           <a:xfrm>
-            <a:off x="365760" y="2286000"/>
-            <a:ext cx="6858000" cy="3383279"/>
+            <a:off x="457200" y="2331720"/>
+            <a:ext cx="11274552" cy="1005839"/>
           </a:xfrm>
           <a:prstGeom prst="roundRect">
             <a:avLst/>
@@ -4581,8 +4761,10 @@
           <a:solidFill>
             <a:srgbClr val="FFFFFF"/>
           </a:solidFill>
-          <a:ln>
-            <a:noFill/>
+          <a:ln w="12700">
+            <a:solidFill>
+              <a:srgbClr val="D0D5DD"/>
+            </a:solidFill>
           </a:ln>
         </p:spPr>
         <p:style>
@@ -4615,8 +4797,8 @@
         </p:nvSpPr>
         <p:spPr>
           <a:xfrm>
-            <a:off x="365760" y="2286000"/>
-            <a:ext cx="109728" cy="3383279"/>
+            <a:off x="457200" y="2331720"/>
+            <a:ext cx="109728" cy="1005839"/>
           </a:xfrm>
           <a:prstGeom prst="rect">
             <a:avLst/>
@@ -4650,112 +4832,9 @@
           </a:p>
         </p:txBody>
       </p:sp>
-      <p:sp>
-        <p:nvSpPr>
-          <p:cNvPr id="8" name="TextBox 7"/>
-          <p:cNvSpPr txBox="1"/>
-          <p:nvPr/>
-        </p:nvSpPr>
-        <p:spPr>
-          <a:xfrm>
-            <a:off x="731520" y="2423160"/>
-            <a:ext cx="6309360" cy="3108960"/>
-          </a:xfrm>
-          <a:prstGeom prst="rect">
-            <a:avLst/>
-          </a:prstGeom>
-          <a:noFill/>
-        </p:spPr>
-        <p:txBody>
-          <a:bodyPr wrap="square">
-            <a:spAutoFit/>
-          </a:bodyPr>
-          <a:lstStyle/>
-          <a:p>
-            <a:pPr algn="l">
-              <a:spcAft>
-                <a:spcPts val="600"/>
-              </a:spcAft>
-            </a:pPr>
-            <a:r>
-              <a:rPr sz="1800" b="0">
-                <a:solidFill>
-                  <a:srgbClr val="451A03"/>
-                </a:solidFill>
-                <a:latin typeface="Arial"/>
-              </a:rPr>
-              <a:t>● Thế hệ 1 (1940-1956): Đèn chân không, rất lớn</a:t>
-            </a:r>
-          </a:p>
-          <a:p>
-            <a:pPr algn="l">
-              <a:spcAft>
-                <a:spcPts val="600"/>
-              </a:spcAft>
-            </a:pPr>
-            <a:r>
-              <a:rPr sz="1800" b="0">
-                <a:solidFill>
-                  <a:srgbClr val="451A03"/>
-                </a:solidFill>
-                <a:latin typeface="Arial"/>
-              </a:rPr>
-              <a:t>● Thế hệ 2 (1956-1963): Transistor, nhỏ hơn</a:t>
-            </a:r>
-          </a:p>
-          <a:p>
-            <a:pPr algn="l">
-              <a:spcAft>
-                <a:spcPts val="600"/>
-              </a:spcAft>
-            </a:pPr>
-            <a:r>
-              <a:rPr sz="1800" b="0">
-                <a:solidFill>
-                  <a:srgbClr val="451A03"/>
-                </a:solidFill>
-                <a:latin typeface="Arial"/>
-              </a:rPr>
-              <a:t>● Thế hệ 3 (1964-1971): Mạch tích hợp (IC)</a:t>
-            </a:r>
-          </a:p>
-          <a:p>
-            <a:pPr algn="l">
-              <a:spcAft>
-                <a:spcPts val="600"/>
-              </a:spcAft>
-            </a:pPr>
-            <a:r>
-              <a:rPr sz="1800" b="0">
-                <a:solidFill>
-                  <a:srgbClr val="451A03"/>
-                </a:solidFill>
-                <a:latin typeface="Arial"/>
-              </a:rPr>
-              <a:t>● Thế hệ 4 (1971-nay): Vi xử lý, PC</a:t>
-            </a:r>
-          </a:p>
-          <a:p>
-            <a:pPr algn="l">
-              <a:spcAft>
-                <a:spcPts val="600"/>
-              </a:spcAft>
-            </a:pPr>
-            <a:r>
-              <a:rPr sz="1800" b="0">
-                <a:solidFill>
-                  <a:srgbClr val="451A03"/>
-                </a:solidFill>
-                <a:latin typeface="Arial"/>
-              </a:rPr>
-              <a:t>● Thế hệ 5 (tương lai): Trí tuệ nhân tạo (AI)</a:t>
-            </a:r>
-          </a:p>
-        </p:txBody>
-      </p:sp>
       <p:pic>
         <p:nvPicPr>
-          <p:cNvPr id="9" name="Picture 8" descr="bai1_page11.png"/>
+          <p:cNvPr id="8" name="Picture 7" descr="bai1_page13.png"/>
           <p:cNvPicPr>
             <a:picLocks noChangeAspect="1"/>
           </p:cNvPicPr>
@@ -4769,14 +4848,343 @@
         </p:blipFill>
         <p:spPr>
           <a:xfrm>
-            <a:off x="7589520" y="2286000"/>
-            <a:ext cx="4114799" cy="3383279"/>
+            <a:off x="731520" y="2423160"/>
+            <a:ext cx="1645920" cy="822959"/>
           </a:xfrm>
           <a:prstGeom prst="rect">
             <a:avLst/>
           </a:prstGeom>
         </p:spPr>
       </p:pic>
+      <p:sp>
+        <p:nvSpPr>
+          <p:cNvPr id="9" name="TextBox 8"/>
+          <p:cNvSpPr txBox="1"/>
+          <p:nvPr/>
+        </p:nvSpPr>
+        <p:spPr>
+          <a:xfrm>
+            <a:off x="2651760" y="2468879"/>
+            <a:ext cx="8897112" cy="731519"/>
+          </a:xfrm>
+          <a:prstGeom prst="rect">
+            <a:avLst/>
+          </a:prstGeom>
+          <a:noFill/>
+        </p:spPr>
+        <p:txBody>
+          <a:bodyPr wrap="square">
+            <a:spAutoFit/>
+          </a:bodyPr>
+          <a:lstStyle/>
+          <a:p>
+            <a:pPr algn="l"/>
+            <a:r>
+              <a:rPr sz="1700" b="0">
+                <a:solidFill>
+                  <a:srgbClr val="451A03"/>
+                </a:solidFill>
+                <a:latin typeface="Arial"/>
+              </a:rPr>
+              <a:t>● ENIAC (1946) — máy tính điện tử đầu tiên, dùng đèn chân không, nặng 30 tấn</a:t>
+            </a:r>
+          </a:p>
+        </p:txBody>
+      </p:sp>
+      <p:sp>
+        <p:nvSpPr>
+          <p:cNvPr id="10" name="Rounded Rectangle 9"/>
+          <p:cNvSpPr/>
+          <p:nvPr/>
+        </p:nvSpPr>
+        <p:spPr>
+          <a:xfrm>
+            <a:off x="457200" y="3520439"/>
+            <a:ext cx="11274552" cy="1005839"/>
+          </a:xfrm>
+          <a:prstGeom prst="roundRect">
+            <a:avLst/>
+          </a:prstGeom>
+          <a:solidFill>
+            <a:srgbClr val="FFFFFF"/>
+          </a:solidFill>
+          <a:ln w="12700">
+            <a:solidFill>
+              <a:srgbClr val="D0D5DD"/>
+            </a:solidFill>
+          </a:ln>
+        </p:spPr>
+        <p:style>
+          <a:lnRef idx="1">
+            <a:schemeClr val="accent1"/>
+          </a:lnRef>
+          <a:fillRef idx="3">
+            <a:schemeClr val="accent1"/>
+          </a:fillRef>
+          <a:effectRef idx="2">
+            <a:schemeClr val="accent1"/>
+          </a:effectRef>
+          <a:fontRef idx="minor">
+            <a:schemeClr val="lt1"/>
+          </a:fontRef>
+        </p:style>
+        <p:txBody>
+          <a:bodyPr rtlCol="0" anchor="ctr"/>
+          <a:lstStyle/>
+          <a:p>
+            <a:pPr algn="ctr"/>
+          </a:p>
+        </p:txBody>
+      </p:sp>
+      <p:sp>
+        <p:nvSpPr>
+          <p:cNvPr id="11" name="Rectangle 10"/>
+          <p:cNvSpPr/>
+          <p:nvPr/>
+        </p:nvSpPr>
+        <p:spPr>
+          <a:xfrm>
+            <a:off x="457200" y="3520439"/>
+            <a:ext cx="109728" cy="1005839"/>
+          </a:xfrm>
+          <a:prstGeom prst="rect">
+            <a:avLst/>
+          </a:prstGeom>
+          <a:solidFill>
+            <a:srgbClr val="F59E0B"/>
+          </a:solidFill>
+          <a:ln>
+            <a:noFill/>
+          </a:ln>
+        </p:spPr>
+        <p:style>
+          <a:lnRef idx="1">
+            <a:schemeClr val="accent1"/>
+          </a:lnRef>
+          <a:fillRef idx="3">
+            <a:schemeClr val="accent1"/>
+          </a:fillRef>
+          <a:effectRef idx="2">
+            <a:schemeClr val="accent1"/>
+          </a:effectRef>
+          <a:fontRef idx="minor">
+            <a:schemeClr val="lt1"/>
+          </a:fontRef>
+        </p:style>
+        <p:txBody>
+          <a:bodyPr rtlCol="0" anchor="ctr"/>
+          <a:lstStyle/>
+          <a:p>
+            <a:pPr algn="ctr"/>
+          </a:p>
+        </p:txBody>
+      </p:sp>
+      <p:pic>
+        <p:nvPicPr>
+          <p:cNvPr id="12" name="Picture 11" descr="bai1_page5.png"/>
+          <p:cNvPicPr>
+            <a:picLocks noChangeAspect="1"/>
+          </p:cNvPicPr>
+          <p:nvPr/>
+        </p:nvPicPr>
+        <p:blipFill>
+          <a:blip r:embed="rId3"/>
+          <a:stretch>
+            <a:fillRect/>
+          </a:stretch>
+        </p:blipFill>
+        <p:spPr>
+          <a:xfrm>
+            <a:off x="731520" y="3611879"/>
+            <a:ext cx="1645920" cy="822959"/>
+          </a:xfrm>
+          <a:prstGeom prst="rect">
+            <a:avLst/>
+          </a:prstGeom>
+        </p:spPr>
+      </p:pic>
+      <p:sp>
+        <p:nvSpPr>
+          <p:cNvPr id="13" name="TextBox 12"/>
+          <p:cNvSpPr txBox="1"/>
+          <p:nvPr/>
+        </p:nvSpPr>
+        <p:spPr>
+          <a:xfrm>
+            <a:off x="2651760" y="3657599"/>
+            <a:ext cx="8897112" cy="731519"/>
+          </a:xfrm>
+          <a:prstGeom prst="rect">
+            <a:avLst/>
+          </a:prstGeom>
+          <a:noFill/>
+        </p:spPr>
+        <p:txBody>
+          <a:bodyPr wrap="square">
+            <a:spAutoFit/>
+          </a:bodyPr>
+          <a:lstStyle/>
+          <a:p>
+            <a:pPr algn="l"/>
+            <a:r>
+              <a:rPr sz="1700" b="0">
+                <a:solidFill>
+                  <a:srgbClr val="451A03"/>
+                </a:solidFill>
+                <a:latin typeface="Arial"/>
+              </a:rPr>
+              <a:t>● Transistor &amp; Mạch tích hợp (IC) — giúp máy tính nhỏ gọn và nhanh hơn gấp ngàn lần</a:t>
+            </a:r>
+          </a:p>
+        </p:txBody>
+      </p:sp>
+      <p:sp>
+        <p:nvSpPr>
+          <p:cNvPr id="14" name="Rounded Rectangle 13"/>
+          <p:cNvSpPr/>
+          <p:nvPr/>
+        </p:nvSpPr>
+        <p:spPr>
+          <a:xfrm>
+            <a:off x="457200" y="4709159"/>
+            <a:ext cx="11274552" cy="1005839"/>
+          </a:xfrm>
+          <a:prstGeom prst="roundRect">
+            <a:avLst/>
+          </a:prstGeom>
+          <a:solidFill>
+            <a:srgbClr val="FFFFFF"/>
+          </a:solidFill>
+          <a:ln w="12700">
+            <a:solidFill>
+              <a:srgbClr val="D0D5DD"/>
+            </a:solidFill>
+          </a:ln>
+        </p:spPr>
+        <p:style>
+          <a:lnRef idx="1">
+            <a:schemeClr val="accent1"/>
+          </a:lnRef>
+          <a:fillRef idx="3">
+            <a:schemeClr val="accent1"/>
+          </a:fillRef>
+          <a:effectRef idx="2">
+            <a:schemeClr val="accent1"/>
+          </a:effectRef>
+          <a:fontRef idx="minor">
+            <a:schemeClr val="lt1"/>
+          </a:fontRef>
+        </p:style>
+        <p:txBody>
+          <a:bodyPr rtlCol="0" anchor="ctr"/>
+          <a:lstStyle/>
+          <a:p>
+            <a:pPr algn="ctr"/>
+          </a:p>
+        </p:txBody>
+      </p:sp>
+      <p:sp>
+        <p:nvSpPr>
+          <p:cNvPr id="15" name="Rectangle 14"/>
+          <p:cNvSpPr/>
+          <p:nvPr/>
+        </p:nvSpPr>
+        <p:spPr>
+          <a:xfrm>
+            <a:off x="457200" y="4709159"/>
+            <a:ext cx="109728" cy="1005839"/>
+          </a:xfrm>
+          <a:prstGeom prst="rect">
+            <a:avLst/>
+          </a:prstGeom>
+          <a:solidFill>
+            <a:srgbClr val="F59E0B"/>
+          </a:solidFill>
+          <a:ln>
+            <a:noFill/>
+          </a:ln>
+        </p:spPr>
+        <p:style>
+          <a:lnRef idx="1">
+            <a:schemeClr val="accent1"/>
+          </a:lnRef>
+          <a:fillRef idx="3">
+            <a:schemeClr val="accent1"/>
+          </a:fillRef>
+          <a:effectRef idx="2">
+            <a:schemeClr val="accent1"/>
+          </a:effectRef>
+          <a:fontRef idx="minor">
+            <a:schemeClr val="lt1"/>
+          </a:fontRef>
+        </p:style>
+        <p:txBody>
+          <a:bodyPr rtlCol="0" anchor="ctr"/>
+          <a:lstStyle/>
+          <a:p>
+            <a:pPr algn="ctr"/>
+          </a:p>
+        </p:txBody>
+      </p:sp>
+      <p:pic>
+        <p:nvPicPr>
+          <p:cNvPr id="16" name="Picture 15" descr="bai1_page6.png"/>
+          <p:cNvPicPr>
+            <a:picLocks noChangeAspect="1"/>
+          </p:cNvPicPr>
+          <p:nvPr/>
+        </p:nvPicPr>
+        <p:blipFill>
+          <a:blip r:embed="rId4"/>
+          <a:stretch>
+            <a:fillRect/>
+          </a:stretch>
+        </p:blipFill>
+        <p:spPr>
+          <a:xfrm>
+            <a:off x="731520" y="4800599"/>
+            <a:ext cx="1645920" cy="822959"/>
+          </a:xfrm>
+          <a:prstGeom prst="rect">
+            <a:avLst/>
+          </a:prstGeom>
+        </p:spPr>
+      </p:pic>
+      <p:sp>
+        <p:nvSpPr>
+          <p:cNvPr id="17" name="TextBox 16"/>
+          <p:cNvSpPr txBox="1"/>
+          <p:nvPr/>
+        </p:nvSpPr>
+        <p:spPr>
+          <a:xfrm>
+            <a:off x="2651760" y="4846320"/>
+            <a:ext cx="8897112" cy="731519"/>
+          </a:xfrm>
+          <a:prstGeom prst="rect">
+            <a:avLst/>
+          </a:prstGeom>
+          <a:noFill/>
+        </p:spPr>
+        <p:txBody>
+          <a:bodyPr wrap="square">
+            <a:spAutoFit/>
+          </a:bodyPr>
+          <a:lstStyle/>
+          <a:p>
+            <a:pPr algn="l"/>
+            <a:r>
+              <a:rPr sz="1700" b="0">
+                <a:solidFill>
+                  <a:srgbClr val="451A03"/>
+                </a:solidFill>
+                <a:latin typeface="Arial"/>
+              </a:rPr>
+              <a:t>● Microprocessor (1971) — sự ra đời của Máy tính cá nhân (PC)</a:t>
+            </a:r>
+          </a:p>
+        </p:txBody>
+      </p:sp>
     </p:spTree>
   </p:cSld>
   <p:clrMapOvr>
@@ -4949,7 +5357,7 @@
                 </a:solidFill>
                 <a:latin typeface="Arial"/>
               </a:rPr>
-              <a:t>Xu hướng phát triển hiện nay</a:t>
+              <a:t>Máy tính thế hệ mới &amp; Trí tuệ nhân tạo</a:t>
             </a:r>
           </a:p>
         </p:txBody>
@@ -4962,8 +5370,8 @@
         </p:nvSpPr>
         <p:spPr>
           <a:xfrm>
-            <a:off x="365760" y="2286000"/>
-            <a:ext cx="6858000" cy="3383279"/>
+            <a:off x="457200" y="2331720"/>
+            <a:ext cx="11274552" cy="1005839"/>
           </a:xfrm>
           <a:prstGeom prst="roundRect">
             <a:avLst/>
@@ -4971,8 +5379,10 @@
           <a:solidFill>
             <a:srgbClr val="FFFFFF"/>
           </a:solidFill>
-          <a:ln>
-            <a:noFill/>
+          <a:ln w="12700">
+            <a:solidFill>
+              <a:srgbClr val="D0D5DD"/>
+            </a:solidFill>
           </a:ln>
         </p:spPr>
         <p:style>
@@ -5005,8 +5415,8 @@
         </p:nvSpPr>
         <p:spPr>
           <a:xfrm>
-            <a:off x="365760" y="2286000"/>
-            <a:ext cx="109728" cy="3383279"/>
+            <a:off x="457200" y="2331720"/>
+            <a:ext cx="109728" cy="1005839"/>
           </a:xfrm>
           <a:prstGeom prst="rect">
             <a:avLst/>
@@ -5040,112 +5450,9 @@
           </a:p>
         </p:txBody>
       </p:sp>
-      <p:sp>
-        <p:nvSpPr>
-          <p:cNvPr id="8" name="TextBox 7"/>
-          <p:cNvSpPr txBox="1"/>
-          <p:nvPr/>
-        </p:nvSpPr>
-        <p:spPr>
-          <a:xfrm>
-            <a:off x="731520" y="2423160"/>
-            <a:ext cx="6309360" cy="3108960"/>
-          </a:xfrm>
-          <a:prstGeom prst="rect">
-            <a:avLst/>
-          </a:prstGeom>
-          <a:noFill/>
-        </p:spPr>
-        <p:txBody>
-          <a:bodyPr wrap="square">
-            <a:spAutoFit/>
-          </a:bodyPr>
-          <a:lstStyle/>
-          <a:p>
-            <a:pPr algn="l">
-              <a:spcAft>
-                <a:spcPts val="600"/>
-              </a:spcAft>
-            </a:pPr>
-            <a:r>
-              <a:rPr sz="1800" b="0">
-                <a:solidFill>
-                  <a:srgbClr val="451A03"/>
-                </a:solidFill>
-                <a:latin typeface="Arial"/>
-              </a:rPr>
-              <a:t>● Máy tính ngày càng NHỎ hơn</a:t>
-            </a:r>
-          </a:p>
-          <a:p>
-            <a:pPr algn="l">
-              <a:spcAft>
-                <a:spcPts val="600"/>
-              </a:spcAft>
-            </a:pPr>
-            <a:r>
-              <a:rPr sz="1800" b="0">
-                <a:solidFill>
-                  <a:srgbClr val="451A03"/>
-                </a:solidFill>
-                <a:latin typeface="Arial"/>
-              </a:rPr>
-              <a:t>● Tốc độ xử lý ngày càng NHANH hơn</a:t>
-            </a:r>
-          </a:p>
-          <a:p>
-            <a:pPr algn="l">
-              <a:spcAft>
-                <a:spcPts val="600"/>
-              </a:spcAft>
-            </a:pPr>
-            <a:r>
-              <a:rPr sz="1800" b="0">
-                <a:solidFill>
-                  <a:srgbClr val="451A03"/>
-                </a:solidFill>
-                <a:latin typeface="Arial"/>
-              </a:rPr>
-              <a:t>● Trí tuệ nhân tạo (AI) — máy biết "suy nghĩ"</a:t>
-            </a:r>
-          </a:p>
-          <a:p>
-            <a:pPr algn="l">
-              <a:spcAft>
-                <a:spcPts val="600"/>
-              </a:spcAft>
-            </a:pPr>
-            <a:r>
-              <a:rPr sz="1800" b="0">
-                <a:solidFill>
-                  <a:srgbClr val="451A03"/>
-                </a:solidFill>
-                <a:latin typeface="Arial"/>
-              </a:rPr>
-              <a:t>● Điện toán đám mây (Cloud Computing)</a:t>
-            </a:r>
-          </a:p>
-          <a:p>
-            <a:pPr algn="l">
-              <a:spcAft>
-                <a:spcPts val="600"/>
-              </a:spcAft>
-            </a:pPr>
-            <a:r>
-              <a:rPr sz="1800" b="0">
-                <a:solidFill>
-                  <a:srgbClr val="451A03"/>
-                </a:solidFill>
-                <a:latin typeface="Arial"/>
-              </a:rPr>
-              <a:t>● Internet vạn vật (IoT)</a:t>
-            </a:r>
-          </a:p>
-        </p:txBody>
-      </p:sp>
       <p:pic>
         <p:nvPicPr>
-          <p:cNvPr id="9" name="Picture 8" descr="bai1_page11.png"/>
+          <p:cNvPr id="8" name="Picture 7" descr="bai1_page7.png"/>
           <p:cNvPicPr>
             <a:picLocks noChangeAspect="1"/>
           </p:cNvPicPr>
@@ -5159,21 +5466,350 @@
         </p:blipFill>
         <p:spPr>
           <a:xfrm>
-            <a:off x="7589520" y="2286000"/>
-            <a:ext cx="4114799" cy="3383279"/>
+            <a:off x="731520" y="2423160"/>
+            <a:ext cx="1645920" cy="822959"/>
           </a:xfrm>
           <a:prstGeom prst="rect">
             <a:avLst/>
           </a:prstGeom>
         </p:spPr>
       </p:pic>
+      <p:sp>
+        <p:nvSpPr>
+          <p:cNvPr id="9" name="TextBox 8"/>
+          <p:cNvSpPr txBox="1"/>
+          <p:nvPr/>
+        </p:nvSpPr>
+        <p:spPr>
+          <a:xfrm>
+            <a:off x="2651760" y="2468879"/>
+            <a:ext cx="8897112" cy="731519"/>
+          </a:xfrm>
+          <a:prstGeom prst="rect">
+            <a:avLst/>
+          </a:prstGeom>
+          <a:noFill/>
+        </p:spPr>
+        <p:txBody>
+          <a:bodyPr wrap="square">
+            <a:spAutoFit/>
+          </a:bodyPr>
+          <a:lstStyle/>
+          <a:p>
+            <a:pPr algn="l"/>
+            <a:r>
+              <a:rPr sz="1700" b="0">
+                <a:solidFill>
+                  <a:srgbClr val="451A03"/>
+                </a:solidFill>
+                <a:latin typeface="Arial"/>
+              </a:rPr>
+              <a:t>● Máy tính ngày càng nhỏ gọn, tốc độ siêu nhanh</a:t>
+            </a:r>
+          </a:p>
+        </p:txBody>
+      </p:sp>
+      <p:sp>
+        <p:nvSpPr>
+          <p:cNvPr id="10" name="Rounded Rectangle 9"/>
+          <p:cNvSpPr/>
+          <p:nvPr/>
+        </p:nvSpPr>
+        <p:spPr>
+          <a:xfrm>
+            <a:off x="457200" y="3520439"/>
+            <a:ext cx="11274552" cy="1005839"/>
+          </a:xfrm>
+          <a:prstGeom prst="roundRect">
+            <a:avLst/>
+          </a:prstGeom>
+          <a:solidFill>
+            <a:srgbClr val="FFFFFF"/>
+          </a:solidFill>
+          <a:ln w="12700">
+            <a:solidFill>
+              <a:srgbClr val="D0D5DD"/>
+            </a:solidFill>
+          </a:ln>
+        </p:spPr>
+        <p:style>
+          <a:lnRef idx="1">
+            <a:schemeClr val="accent1"/>
+          </a:lnRef>
+          <a:fillRef idx="3">
+            <a:schemeClr val="accent1"/>
+          </a:fillRef>
+          <a:effectRef idx="2">
+            <a:schemeClr val="accent1"/>
+          </a:effectRef>
+          <a:fontRef idx="minor">
+            <a:schemeClr val="lt1"/>
+          </a:fontRef>
+        </p:style>
+        <p:txBody>
+          <a:bodyPr rtlCol="0" anchor="ctr"/>
+          <a:lstStyle/>
+          <a:p>
+            <a:pPr algn="ctr"/>
+          </a:p>
+        </p:txBody>
+      </p:sp>
+      <p:sp>
+        <p:nvSpPr>
+          <p:cNvPr id="11" name="Rectangle 10"/>
+          <p:cNvSpPr/>
+          <p:nvPr/>
+        </p:nvSpPr>
+        <p:spPr>
+          <a:xfrm>
+            <a:off x="457200" y="3520439"/>
+            <a:ext cx="109728" cy="1005839"/>
+          </a:xfrm>
+          <a:prstGeom prst="rect">
+            <a:avLst/>
+          </a:prstGeom>
+          <a:solidFill>
+            <a:srgbClr val="F59E0B"/>
+          </a:solidFill>
+          <a:ln>
+            <a:noFill/>
+          </a:ln>
+        </p:spPr>
+        <p:style>
+          <a:lnRef idx="1">
+            <a:schemeClr val="accent1"/>
+          </a:lnRef>
+          <a:fillRef idx="3">
+            <a:schemeClr val="accent1"/>
+          </a:fillRef>
+          <a:effectRef idx="2">
+            <a:schemeClr val="accent1"/>
+          </a:effectRef>
+          <a:fontRef idx="minor">
+            <a:schemeClr val="lt1"/>
+          </a:fontRef>
+        </p:style>
+        <p:txBody>
+          <a:bodyPr rtlCol="0" anchor="ctr"/>
+          <a:lstStyle/>
+          <a:p>
+            <a:pPr algn="ctr"/>
+          </a:p>
+        </p:txBody>
+      </p:sp>
+      <p:pic>
+        <p:nvPicPr>
+          <p:cNvPr id="12" name="Picture 11" descr="bai1_page8.png"/>
+          <p:cNvPicPr>
+            <a:picLocks noChangeAspect="1"/>
+          </p:cNvPicPr>
+          <p:nvPr/>
+        </p:nvPicPr>
+        <p:blipFill>
+          <a:blip r:embed="rId3"/>
+          <a:stretch>
+            <a:fillRect/>
+          </a:stretch>
+        </p:blipFill>
+        <p:spPr>
+          <a:xfrm>
+            <a:off x="731520" y="3611879"/>
+            <a:ext cx="1645920" cy="822959"/>
+          </a:xfrm>
+          <a:prstGeom prst="rect">
+            <a:avLst/>
+          </a:prstGeom>
+        </p:spPr>
+      </p:pic>
+      <p:sp>
+        <p:nvSpPr>
+          <p:cNvPr id="13" name="TextBox 12"/>
+          <p:cNvSpPr txBox="1"/>
+          <p:nvPr/>
+        </p:nvSpPr>
+        <p:spPr>
+          <a:xfrm>
+            <a:off x="2651760" y="3657599"/>
+            <a:ext cx="8897112" cy="731519"/>
+          </a:xfrm>
+          <a:prstGeom prst="rect">
+            <a:avLst/>
+          </a:prstGeom>
+          <a:noFill/>
+        </p:spPr>
+        <p:txBody>
+          <a:bodyPr wrap="square">
+            <a:spAutoFit/>
+          </a:bodyPr>
+          <a:lstStyle/>
+          <a:p>
+            <a:pPr algn="l"/>
+            <a:r>
+              <a:rPr sz="1700" b="0">
+                <a:solidFill>
+                  <a:srgbClr val="451A03"/>
+                </a:solidFill>
+                <a:latin typeface="Arial"/>
+              </a:rPr>
+              <a:t>● Điện toán đám mây &amp; Internet vạn vật (IoT)</a:t>
+            </a:r>
+          </a:p>
+        </p:txBody>
+      </p:sp>
+      <p:sp>
+        <p:nvSpPr>
+          <p:cNvPr id="14" name="Rounded Rectangle 13"/>
+          <p:cNvSpPr/>
+          <p:nvPr/>
+        </p:nvSpPr>
+        <p:spPr>
+          <a:xfrm>
+            <a:off x="457200" y="4709159"/>
+            <a:ext cx="11274552" cy="1005839"/>
+          </a:xfrm>
+          <a:prstGeom prst="roundRect">
+            <a:avLst/>
+          </a:prstGeom>
+          <a:solidFill>
+            <a:srgbClr val="FFFFFF"/>
+          </a:solidFill>
+          <a:ln w="12700">
+            <a:solidFill>
+              <a:srgbClr val="D0D5DD"/>
+            </a:solidFill>
+          </a:ln>
+        </p:spPr>
+        <p:style>
+          <a:lnRef idx="1">
+            <a:schemeClr val="accent1"/>
+          </a:lnRef>
+          <a:fillRef idx="3">
+            <a:schemeClr val="accent1"/>
+          </a:fillRef>
+          <a:effectRef idx="2">
+            <a:schemeClr val="accent1"/>
+          </a:effectRef>
+          <a:fontRef idx="minor">
+            <a:schemeClr val="lt1"/>
+          </a:fontRef>
+        </p:style>
+        <p:txBody>
+          <a:bodyPr rtlCol="0" anchor="ctr"/>
+          <a:lstStyle/>
+          <a:p>
+            <a:pPr algn="ctr"/>
+          </a:p>
+        </p:txBody>
+      </p:sp>
+      <p:sp>
+        <p:nvSpPr>
+          <p:cNvPr id="15" name="Rectangle 14"/>
+          <p:cNvSpPr/>
+          <p:nvPr/>
+        </p:nvSpPr>
+        <p:spPr>
+          <a:xfrm>
+            <a:off x="457200" y="4709159"/>
+            <a:ext cx="109728" cy="1005839"/>
+          </a:xfrm>
+          <a:prstGeom prst="rect">
+            <a:avLst/>
+          </a:prstGeom>
+          <a:solidFill>
+            <a:srgbClr val="F59E0B"/>
+          </a:solidFill>
+          <a:ln>
+            <a:noFill/>
+          </a:ln>
+        </p:spPr>
+        <p:style>
+          <a:lnRef idx="1">
+            <a:schemeClr val="accent1"/>
+          </a:lnRef>
+          <a:fillRef idx="3">
+            <a:schemeClr val="accent1"/>
+          </a:fillRef>
+          <a:effectRef idx="2">
+            <a:schemeClr val="accent1"/>
+          </a:effectRef>
+          <a:fontRef idx="minor">
+            <a:schemeClr val="lt1"/>
+          </a:fontRef>
+        </p:style>
+        <p:txBody>
+          <a:bodyPr rtlCol="0" anchor="ctr"/>
+          <a:lstStyle/>
+          <a:p>
+            <a:pPr algn="ctr"/>
+          </a:p>
+        </p:txBody>
+      </p:sp>
+      <p:pic>
+        <p:nvPicPr>
+          <p:cNvPr id="16" name="Picture 15" descr="bai1_page9.png"/>
+          <p:cNvPicPr>
+            <a:picLocks noChangeAspect="1"/>
+          </p:cNvPicPr>
+          <p:nvPr/>
+        </p:nvPicPr>
+        <p:blipFill>
+          <a:blip r:embed="rId4"/>
+          <a:stretch>
+            <a:fillRect/>
+          </a:stretch>
+        </p:blipFill>
+        <p:spPr>
+          <a:xfrm>
+            <a:off x="731520" y="4800599"/>
+            <a:ext cx="1645920" cy="822959"/>
+          </a:xfrm>
+          <a:prstGeom prst="rect">
+            <a:avLst/>
+          </a:prstGeom>
+        </p:spPr>
+      </p:pic>
+      <p:sp>
+        <p:nvSpPr>
+          <p:cNvPr id="17" name="TextBox 16"/>
+          <p:cNvSpPr txBox="1"/>
+          <p:nvPr/>
+        </p:nvSpPr>
+        <p:spPr>
+          <a:xfrm>
+            <a:off x="2651760" y="4846320"/>
+            <a:ext cx="8897112" cy="731519"/>
+          </a:xfrm>
+          <a:prstGeom prst="rect">
+            <a:avLst/>
+          </a:prstGeom>
+          <a:noFill/>
+        </p:spPr>
+        <p:txBody>
+          <a:bodyPr wrap="square">
+            <a:spAutoFit/>
+          </a:bodyPr>
+          <a:lstStyle/>
+          <a:p>
+            <a:pPr algn="l"/>
+            <a:r>
+              <a:rPr sz="1700" b="0">
+                <a:solidFill>
+                  <a:srgbClr val="451A03"/>
+                </a:solidFill>
+                <a:latin typeface="Arial"/>
+              </a:rPr>
+              <a:t>● Trí tuệ nhân tạo (AI) — máy tính biết học hỏi và suy luận</a:t>
+            </a:r>
+          </a:p>
+        </p:txBody>
+      </p:sp>
     </p:spTree>
   </p:cSld>
   <p:clrMapOvr>
     <a:masterClrMapping/>
   </p:clrMapOvr>
   <p:transition spd="med">
-    <p:fade/>
+    <p:wipe/>
   </p:transition>
 </p:sld>
 </file>
@@ -5339,7 +5975,7 @@
                 </a:solidFill>
                 <a:latin typeface="Arial"/>
               </a:rPr>
-              <a:t>Sắp xếp theo thời gian!</a:t>
+              <a:t>Sắp xếp mốc lịch sử!</a:t>
             </a:r>
           </a:p>
         </p:txBody>
@@ -5353,7 +5989,7 @@
         <p:spPr>
           <a:xfrm>
             <a:off x="457200" y="2286000"/>
-            <a:ext cx="11274552" cy="822960"/>
+            <a:ext cx="11274552" cy="640080"/>
           </a:xfrm>
           <a:prstGeom prst="rect">
             <a:avLst/>
@@ -5372,13 +6008,13 @@
               </a:spcAft>
             </a:pPr>
             <a:r>
-              <a:rPr sz="1700" b="0">
+              <a:rPr sz="1800" b="0">
                 <a:solidFill>
                   <a:srgbClr val="78350F"/>
                 </a:solidFill>
                 <a:latin typeface="Arial"/>
               </a:rPr>
-              <a:t>Hãy sắp xếp đúng thứ tự lịch sử:</a:t>
+              <a:t>Sắp xếp theo đúng tiến trình thời gian:</a:t>
             </a:r>
           </a:p>
         </p:txBody>
@@ -5391,8 +6027,8 @@
         </p:nvSpPr>
         <p:spPr>
           <a:xfrm>
-            <a:off x="457200" y="3200400"/>
-            <a:ext cx="5545836" cy="548639"/>
+            <a:off x="457200" y="3017520"/>
+            <a:ext cx="5522976" cy="1280159"/>
           </a:xfrm>
           <a:prstGeom prst="roundRect">
             <a:avLst/>
@@ -5428,16 +6064,40 @@
           </a:p>
         </p:txBody>
       </p:sp>
-      <p:sp>
-        <p:nvSpPr>
-          <p:cNvPr id="8" name="TextBox 7"/>
+      <p:pic>
+        <p:nvPicPr>
+          <p:cNvPr id="8" name="Picture 7" descr="bai1_page10.png"/>
+          <p:cNvPicPr>
+            <a:picLocks noChangeAspect="1"/>
+          </p:cNvPicPr>
+          <p:nvPr/>
+        </p:nvPicPr>
+        <p:blipFill>
+          <a:blip r:embed="rId2"/>
+          <a:stretch>
+            <a:fillRect/>
+          </a:stretch>
+        </p:blipFill>
+        <p:spPr>
+          <a:xfrm>
+            <a:off x="640080" y="3154679"/>
+            <a:ext cx="1280160" cy="1005840"/>
+          </a:xfrm>
+          <a:prstGeom prst="rect">
+            <a:avLst/>
+          </a:prstGeom>
+        </p:spPr>
+      </p:pic>
+      <p:sp>
+        <p:nvSpPr>
+          <p:cNvPr id="9" name="TextBox 8"/>
           <p:cNvSpPr txBox="1"/>
           <p:nvPr/>
         </p:nvSpPr>
         <p:spPr>
           <a:xfrm>
-            <a:off x="685800" y="3291840"/>
-            <a:ext cx="5180076" cy="365760"/>
+            <a:off x="2103120" y="3154679"/>
+            <a:ext cx="3785616" cy="1005839"/>
           </a:xfrm>
           <a:prstGeom prst="rect">
             <a:avLst/>
@@ -5452,27 +6112,27 @@
           <a:p>
             <a:pPr algn="l"/>
             <a:r>
-              <a:rPr sz="1500" b="0">
+              <a:rPr sz="1600" b="1">
                 <a:solidFill>
                   <a:srgbClr val="451A03"/>
                 </a:solidFill>
                 <a:latin typeface="Arial"/>
               </a:rPr>
-              <a:t>ENIAC (1946)</a:t>
-            </a:r>
-          </a:p>
-        </p:txBody>
-      </p:sp>
-      <p:sp>
-        <p:nvSpPr>
-          <p:cNvPr id="9" name="Rounded Rectangle 8"/>
+              <a:t>Bàn tính Abacus (~2400 TCN) ↔ Công cụ đầu tiên</a:t>
+            </a:r>
+          </a:p>
+        </p:txBody>
+      </p:sp>
+      <p:sp>
+        <p:nvSpPr>
+          <p:cNvPr id="10" name="Rounded Rectangle 9"/>
           <p:cNvSpPr/>
           <p:nvPr/>
         </p:nvSpPr>
         <p:spPr>
           <a:xfrm>
-            <a:off x="6185916" y="3200400"/>
-            <a:ext cx="5545836" cy="548639"/>
+            <a:off x="6208776" y="3017520"/>
+            <a:ext cx="5522976" cy="1280159"/>
           </a:xfrm>
           <a:prstGeom prst="roundRect">
             <a:avLst/>
@@ -5508,16 +6168,40 @@
           </a:p>
         </p:txBody>
       </p:sp>
-      <p:sp>
-        <p:nvSpPr>
-          <p:cNvPr id="10" name="TextBox 9"/>
+      <p:pic>
+        <p:nvPicPr>
+          <p:cNvPr id="11" name="Picture 10" descr="bai1_page11.png"/>
+          <p:cNvPicPr>
+            <a:picLocks noChangeAspect="1"/>
+          </p:cNvPicPr>
+          <p:nvPr/>
+        </p:nvPicPr>
+        <p:blipFill>
+          <a:blip r:embed="rId3"/>
+          <a:stretch>
+            <a:fillRect/>
+          </a:stretch>
+        </p:blipFill>
+        <p:spPr>
+          <a:xfrm>
+            <a:off x="6391656" y="3154679"/>
+            <a:ext cx="1280160" cy="1005840"/>
+          </a:xfrm>
+          <a:prstGeom prst="rect">
+            <a:avLst/>
+          </a:prstGeom>
+        </p:spPr>
+      </p:pic>
+      <p:sp>
+        <p:nvSpPr>
+          <p:cNvPr id="12" name="TextBox 11"/>
           <p:cNvSpPr txBox="1"/>
           <p:nvPr/>
         </p:nvSpPr>
         <p:spPr>
           <a:xfrm>
-            <a:off x="6414516" y="3291840"/>
-            <a:ext cx="5180076" cy="365760"/>
+            <a:off x="7854696" y="3154679"/>
+            <a:ext cx="3785616" cy="1005839"/>
           </a:xfrm>
           <a:prstGeom prst="rect">
             <a:avLst/>
@@ -5532,27 +6216,27 @@
           <a:p>
             <a:pPr algn="l"/>
             <a:r>
-              <a:rPr sz="1500" b="0">
+              <a:rPr sz="1600" b="1">
                 <a:solidFill>
                   <a:srgbClr val="451A03"/>
                 </a:solidFill>
                 <a:latin typeface="Arial"/>
               </a:rPr>
-              <a:t>Abacus (~2400 TCN)</a:t>
-            </a:r>
-          </a:p>
-        </p:txBody>
-      </p:sp>
-      <p:sp>
-        <p:nvSpPr>
-          <p:cNvPr id="11" name="Rounded Rectangle 10"/>
+              <a:t>Máy tính Pascaline (1642) ↔ Bánh răng cơ học</a:t>
+            </a:r>
+          </a:p>
+        </p:txBody>
+      </p:sp>
+      <p:sp>
+        <p:nvSpPr>
+          <p:cNvPr id="13" name="Rounded Rectangle 12"/>
           <p:cNvSpPr/>
           <p:nvPr/>
         </p:nvSpPr>
         <p:spPr>
           <a:xfrm>
-            <a:off x="457200" y="3886200"/>
-            <a:ext cx="5545836" cy="548639"/>
+            <a:off x="457200" y="4526279"/>
+            <a:ext cx="5522976" cy="1280160"/>
           </a:xfrm>
           <a:prstGeom prst="roundRect">
             <a:avLst/>
@@ -5588,16 +6272,40 @@
           </a:p>
         </p:txBody>
       </p:sp>
-      <p:sp>
-        <p:nvSpPr>
-          <p:cNvPr id="12" name="TextBox 11"/>
+      <p:pic>
+        <p:nvPicPr>
+          <p:cNvPr id="14" name="Picture 13" descr="bai1_page12.png"/>
+          <p:cNvPicPr>
+            <a:picLocks noChangeAspect="1"/>
+          </p:cNvPicPr>
+          <p:nvPr/>
+        </p:nvPicPr>
+        <p:blipFill>
+          <a:blip r:embed="rId4"/>
+          <a:stretch>
+            <a:fillRect/>
+          </a:stretch>
+        </p:blipFill>
+        <p:spPr>
+          <a:xfrm>
+            <a:off x="640080" y="4663440"/>
+            <a:ext cx="1280160" cy="1005839"/>
+          </a:xfrm>
+          <a:prstGeom prst="rect">
+            <a:avLst/>
+          </a:prstGeom>
+        </p:spPr>
+      </p:pic>
+      <p:sp>
+        <p:nvSpPr>
+          <p:cNvPr id="15" name="TextBox 14"/>
           <p:cNvSpPr txBox="1"/>
           <p:nvPr/>
         </p:nvSpPr>
         <p:spPr>
           <a:xfrm>
-            <a:off x="685800" y="3977639"/>
-            <a:ext cx="5180076" cy="365760"/>
+            <a:off x="2103120" y="4663440"/>
+            <a:ext cx="3785616" cy="1005839"/>
           </a:xfrm>
           <a:prstGeom prst="rect">
             <a:avLst/>
@@ -5612,27 +6320,27 @@
           <a:p>
             <a:pPr algn="l"/>
             <a:r>
-              <a:rPr sz="1500" b="0">
+              <a:rPr sz="1600" b="1">
                 <a:solidFill>
                   <a:srgbClr val="451A03"/>
                 </a:solidFill>
                 <a:latin typeface="Arial"/>
               </a:rPr>
-              <a:t>Microprocessor (1971)</a:t>
-            </a:r>
-          </a:p>
-        </p:txBody>
-      </p:sp>
-      <p:sp>
-        <p:nvSpPr>
-          <p:cNvPr id="13" name="Rounded Rectangle 12"/>
+              <a:t>Máy tính ENIAC (1946) ↔ Đèn chân không</a:t>
+            </a:r>
+          </a:p>
+        </p:txBody>
+      </p:sp>
+      <p:sp>
+        <p:nvSpPr>
+          <p:cNvPr id="16" name="Rounded Rectangle 15"/>
           <p:cNvSpPr/>
           <p:nvPr/>
         </p:nvSpPr>
         <p:spPr>
           <a:xfrm>
-            <a:off x="6185916" y="3886200"/>
-            <a:ext cx="5545836" cy="548639"/>
+            <a:off x="6208776" y="4526279"/>
+            <a:ext cx="5522976" cy="1280160"/>
           </a:xfrm>
           <a:prstGeom prst="roundRect">
             <a:avLst/>
@@ -5668,16 +6376,40 @@
           </a:p>
         </p:txBody>
       </p:sp>
-      <p:sp>
-        <p:nvSpPr>
-          <p:cNvPr id="14" name="TextBox 13"/>
+      <p:pic>
+        <p:nvPicPr>
+          <p:cNvPr id="17" name="Picture 16" descr="bai1_page13.png"/>
+          <p:cNvPicPr>
+            <a:picLocks noChangeAspect="1"/>
+          </p:cNvPicPr>
+          <p:nvPr/>
+        </p:nvPicPr>
+        <p:blipFill>
+          <a:blip r:embed="rId5"/>
+          <a:stretch>
+            <a:fillRect/>
+          </a:stretch>
+        </p:blipFill>
+        <p:spPr>
+          <a:xfrm>
+            <a:off x="6391656" y="4663440"/>
+            <a:ext cx="1280160" cy="1005839"/>
+          </a:xfrm>
+          <a:prstGeom prst="rect">
+            <a:avLst/>
+          </a:prstGeom>
+        </p:spPr>
+      </p:pic>
+      <p:sp>
+        <p:nvSpPr>
+          <p:cNvPr id="18" name="TextBox 17"/>
           <p:cNvSpPr txBox="1"/>
           <p:nvPr/>
         </p:nvSpPr>
         <p:spPr>
           <a:xfrm>
-            <a:off x="6414516" y="3977639"/>
-            <a:ext cx="5180076" cy="365760"/>
+            <a:off x="7854696" y="4663440"/>
+            <a:ext cx="3785616" cy="1005839"/>
           </a:xfrm>
           <a:prstGeom prst="rect">
             <a:avLst/>
@@ -5692,93 +6424,13 @@
           <a:p>
             <a:pPr algn="l"/>
             <a:r>
-              <a:rPr sz="1500" b="0">
+              <a:rPr sz="1600" b="1">
                 <a:solidFill>
                   <a:srgbClr val="451A03"/>
                 </a:solidFill>
                 <a:latin typeface="Arial"/>
               </a:rPr>
-              <a:t>Pascaline (1642)</a:t>
-            </a:r>
-          </a:p>
-        </p:txBody>
-      </p:sp>
-      <p:sp>
-        <p:nvSpPr>
-          <p:cNvPr id="15" name="Rounded Rectangle 14"/>
-          <p:cNvSpPr/>
-          <p:nvPr/>
-        </p:nvSpPr>
-        <p:spPr>
-          <a:xfrm>
-            <a:off x="457200" y="4572000"/>
-            <a:ext cx="5545836" cy="548639"/>
-          </a:xfrm>
-          <a:prstGeom prst="roundRect">
-            <a:avLst/>
-          </a:prstGeom>
-          <a:solidFill>
-            <a:srgbClr val="FFFFFF"/>
-          </a:solidFill>
-          <a:ln w="12700">
-            <a:solidFill>
-              <a:srgbClr val="F59E0B"/>
-            </a:solidFill>
-          </a:ln>
-        </p:spPr>
-        <p:style>
-          <a:lnRef idx="1">
-            <a:schemeClr val="accent1"/>
-          </a:lnRef>
-          <a:fillRef idx="3">
-            <a:schemeClr val="accent1"/>
-          </a:fillRef>
-          <a:effectRef idx="2">
-            <a:schemeClr val="accent1"/>
-          </a:effectRef>
-          <a:fontRef idx="minor">
-            <a:schemeClr val="lt1"/>
-          </a:fontRef>
-        </p:style>
-        <p:txBody>
-          <a:bodyPr rtlCol="0" anchor="ctr"/>
-          <a:lstStyle/>
-          <a:p>
-            <a:pPr algn="ctr"/>
-          </a:p>
-        </p:txBody>
-      </p:sp>
-      <p:sp>
-        <p:nvSpPr>
-          <p:cNvPr id="16" name="TextBox 15"/>
-          <p:cNvSpPr txBox="1"/>
-          <p:nvPr/>
-        </p:nvSpPr>
-        <p:spPr>
-          <a:xfrm>
-            <a:off x="685800" y="4663440"/>
-            <a:ext cx="5180076" cy="365760"/>
-          </a:xfrm>
-          <a:prstGeom prst="rect">
-            <a:avLst/>
-          </a:prstGeom>
-          <a:noFill/>
-        </p:spPr>
-        <p:txBody>
-          <a:bodyPr wrap="square">
-            <a:spAutoFit/>
-          </a:bodyPr>
-          <a:lstStyle/>
-          <a:p>
-            <a:pPr algn="l"/>
-            <a:r>
-              <a:rPr sz="1500" b="0">
-                <a:solidFill>
-                  <a:srgbClr val="451A03"/>
-                </a:solidFill>
-                <a:latin typeface="Arial"/>
-              </a:rPr>
-              <a:t>Smartphone (2007)</a:t>
+              <a:t>Vi xử lý Intel (1971) ↔ Máy tính cá nhân (PC)</a:t>
             </a:r>
           </a:p>
         </p:txBody>
@@ -5788,6 +6440,396 @@
   <p:clrMapOvr>
     <a:masterClrMapping/>
   </p:clrMapOvr>
+  <p:timing>
+    <p:tnLst>
+      <p:par>
+        <p:cTn id="1" dur="indefinite" restart="never" nodeType="tmRoot">
+          <p:childTnLst>
+            <p:seq concurrent="1" nextAc="seek">
+              <p:cTn id="2" dur="indefinite" nodeType="mainSeq">
+                <p:childTnLst>
+                  <p:par>
+                    <p:cTn id="3" fill="hold">
+                      <p:stCondLst>
+                        <p:cond delay="0"/>
+                      </p:stCondLst>
+                      <p:childTnLst>
+                        <p:par>
+                          <p:cTn id="4" presetID="1" presetClass="entr" presetSubtype="0" fill="hold">
+                            <p:stCondLst>
+                              <p:cond delay="0"/>
+                            </p:stCondLst>
+                            <p:childTnLst>
+                              <p:set>
+                                <p:cBhvr>
+                                  <p:cTn id="5" dur="1" fill="hold">
+                                    <p:stCondLst>
+                                      <p:cond delay="0"/>
+                                    </p:stCondLst>
+                                  </p:cTn>
+                                  <p:tgtEl>
+                                    <p:spTgt spid="7"/>
+                                  </p:tgtEl>
+                                  <p:attrNameLst>
+                                    <p:attrName>style.visibility</p:attrName>
+                                  </p:attrNameLst>
+                                </p:cBhvr>
+                                <p:to>
+                                  <p:strVal val="visible"/>
+                                </p:to>
+                              </p:set>
+                            </p:childTnLst>
+                          </p:cTn>
+                        </p:par>
+                        <p:par>
+                          <p:cTn id="6" presetID="1" presetClass="entr" presetSubtype="0" fill="hold">
+                            <p:stCondLst>
+                              <p:cond delay="0"/>
+                            </p:stCondLst>
+                            <p:childTnLst>
+                              <p:set>
+                                <p:cBhvr>
+                                  <p:cTn id="7" dur="1" fill="hold">
+                                    <p:stCondLst>
+                                      <p:cond delay="0"/>
+                                    </p:stCondLst>
+                                  </p:cTn>
+                                  <p:tgtEl>
+                                    <p:spTgt spid="8"/>
+                                  </p:tgtEl>
+                                  <p:attrNameLst>
+                                    <p:attrName>style.visibility</p:attrName>
+                                  </p:attrNameLst>
+                                </p:cBhvr>
+                                <p:to>
+                                  <p:strVal val="visible"/>
+                                </p:to>
+                              </p:set>
+                            </p:childTnLst>
+                          </p:cTn>
+                        </p:par>
+                        <p:par>
+                          <p:cTn id="8" presetID="1" presetClass="entr" presetSubtype="0" fill="hold">
+                            <p:stCondLst>
+                              <p:cond delay="0"/>
+                            </p:stCondLst>
+                            <p:childTnLst>
+                              <p:set>
+                                <p:cBhvr>
+                                  <p:cTn id="9" dur="1" fill="hold">
+                                    <p:stCondLst>
+                                      <p:cond delay="0"/>
+                                    </p:stCondLst>
+                                  </p:cTn>
+                                  <p:tgtEl>
+                                    <p:spTgt spid="9"/>
+                                  </p:tgtEl>
+                                  <p:attrNameLst>
+                                    <p:attrName>style.visibility</p:attrName>
+                                  </p:attrNameLst>
+                                </p:cBhvr>
+                                <p:to>
+                                  <p:strVal val="visible"/>
+                                </p:to>
+                              </p:set>
+                            </p:childTnLst>
+                          </p:cTn>
+                        </p:par>
+                      </p:childTnLst>
+                    </p:cTn>
+                  </p:par>
+                  <p:par>
+                    <p:cTn id="10" fill="hold">
+                      <p:stCondLst>
+                        <p:cond delay="0"/>
+                      </p:stCondLst>
+                      <p:childTnLst>
+                        <p:par>
+                          <p:cTn id="11" presetID="1" presetClass="entr" presetSubtype="0" fill="hold">
+                            <p:stCondLst>
+                              <p:cond delay="0"/>
+                            </p:stCondLst>
+                            <p:childTnLst>
+                              <p:set>
+                                <p:cBhvr>
+                                  <p:cTn id="12" dur="1" fill="hold">
+                                    <p:stCondLst>
+                                      <p:cond delay="0"/>
+                                    </p:stCondLst>
+                                  </p:cTn>
+                                  <p:tgtEl>
+                                    <p:spTgt spid="10"/>
+                                  </p:tgtEl>
+                                  <p:attrNameLst>
+                                    <p:attrName>style.visibility</p:attrName>
+                                  </p:attrNameLst>
+                                </p:cBhvr>
+                                <p:to>
+                                  <p:strVal val="visible"/>
+                                </p:to>
+                              </p:set>
+                            </p:childTnLst>
+                          </p:cTn>
+                        </p:par>
+                        <p:par>
+                          <p:cTn id="13" presetID="1" presetClass="entr" presetSubtype="0" fill="hold">
+                            <p:stCondLst>
+                              <p:cond delay="0"/>
+                            </p:stCondLst>
+                            <p:childTnLst>
+                              <p:set>
+                                <p:cBhvr>
+                                  <p:cTn id="14" dur="1" fill="hold">
+                                    <p:stCondLst>
+                                      <p:cond delay="0"/>
+                                    </p:stCondLst>
+                                  </p:cTn>
+                                  <p:tgtEl>
+                                    <p:spTgt spid="11"/>
+                                  </p:tgtEl>
+                                  <p:attrNameLst>
+                                    <p:attrName>style.visibility</p:attrName>
+                                  </p:attrNameLst>
+                                </p:cBhvr>
+                                <p:to>
+                                  <p:strVal val="visible"/>
+                                </p:to>
+                              </p:set>
+                            </p:childTnLst>
+                          </p:cTn>
+                        </p:par>
+                        <p:par>
+                          <p:cTn id="15" presetID="1" presetClass="entr" presetSubtype="0" fill="hold">
+                            <p:stCondLst>
+                              <p:cond delay="0"/>
+                            </p:stCondLst>
+                            <p:childTnLst>
+                              <p:set>
+                                <p:cBhvr>
+                                  <p:cTn id="16" dur="1" fill="hold">
+                                    <p:stCondLst>
+                                      <p:cond delay="0"/>
+                                    </p:stCondLst>
+                                  </p:cTn>
+                                  <p:tgtEl>
+                                    <p:spTgt spid="12"/>
+                                  </p:tgtEl>
+                                  <p:attrNameLst>
+                                    <p:attrName>style.visibility</p:attrName>
+                                  </p:attrNameLst>
+                                </p:cBhvr>
+                                <p:to>
+                                  <p:strVal val="visible"/>
+                                </p:to>
+                              </p:set>
+                            </p:childTnLst>
+                          </p:cTn>
+                        </p:par>
+                      </p:childTnLst>
+                    </p:cTn>
+                  </p:par>
+                  <p:par>
+                    <p:cTn id="17" fill="hold">
+                      <p:stCondLst>
+                        <p:cond delay="0"/>
+                      </p:stCondLst>
+                      <p:childTnLst>
+                        <p:par>
+                          <p:cTn id="18" presetID="1" presetClass="entr" presetSubtype="0" fill="hold">
+                            <p:stCondLst>
+                              <p:cond delay="0"/>
+                            </p:stCondLst>
+                            <p:childTnLst>
+                              <p:set>
+                                <p:cBhvr>
+                                  <p:cTn id="19" dur="1" fill="hold">
+                                    <p:stCondLst>
+                                      <p:cond delay="0"/>
+                                    </p:stCondLst>
+                                  </p:cTn>
+                                  <p:tgtEl>
+                                    <p:spTgt spid="13"/>
+                                  </p:tgtEl>
+                                  <p:attrNameLst>
+                                    <p:attrName>style.visibility</p:attrName>
+                                  </p:attrNameLst>
+                                </p:cBhvr>
+                                <p:to>
+                                  <p:strVal val="visible"/>
+                                </p:to>
+                              </p:set>
+                            </p:childTnLst>
+                          </p:cTn>
+                        </p:par>
+                        <p:par>
+                          <p:cTn id="20" presetID="1" presetClass="entr" presetSubtype="0" fill="hold">
+                            <p:stCondLst>
+                              <p:cond delay="0"/>
+                            </p:stCondLst>
+                            <p:childTnLst>
+                              <p:set>
+                                <p:cBhvr>
+                                  <p:cTn id="21" dur="1" fill="hold">
+                                    <p:stCondLst>
+                                      <p:cond delay="0"/>
+                                    </p:stCondLst>
+                                  </p:cTn>
+                                  <p:tgtEl>
+                                    <p:spTgt spid="14"/>
+                                  </p:tgtEl>
+                                  <p:attrNameLst>
+                                    <p:attrName>style.visibility</p:attrName>
+                                  </p:attrNameLst>
+                                </p:cBhvr>
+                                <p:to>
+                                  <p:strVal val="visible"/>
+                                </p:to>
+                              </p:set>
+                            </p:childTnLst>
+                          </p:cTn>
+                        </p:par>
+                        <p:par>
+                          <p:cTn id="22" presetID="1" presetClass="entr" presetSubtype="0" fill="hold">
+                            <p:stCondLst>
+                              <p:cond delay="0"/>
+                            </p:stCondLst>
+                            <p:childTnLst>
+                              <p:set>
+                                <p:cBhvr>
+                                  <p:cTn id="23" dur="1" fill="hold">
+                                    <p:stCondLst>
+                                      <p:cond delay="0"/>
+                                    </p:stCondLst>
+                                  </p:cTn>
+                                  <p:tgtEl>
+                                    <p:spTgt spid="15"/>
+                                  </p:tgtEl>
+                                  <p:attrNameLst>
+                                    <p:attrName>style.visibility</p:attrName>
+                                  </p:attrNameLst>
+                                </p:cBhvr>
+                                <p:to>
+                                  <p:strVal val="visible"/>
+                                </p:to>
+                              </p:set>
+                            </p:childTnLst>
+                          </p:cTn>
+                        </p:par>
+                      </p:childTnLst>
+                    </p:cTn>
+                  </p:par>
+                  <p:par>
+                    <p:cTn id="24" fill="hold">
+                      <p:stCondLst>
+                        <p:cond delay="0"/>
+                      </p:stCondLst>
+                      <p:childTnLst>
+                        <p:par>
+                          <p:cTn id="25" presetID="1" presetClass="entr" presetSubtype="0" fill="hold">
+                            <p:stCondLst>
+                              <p:cond delay="0"/>
+                            </p:stCondLst>
+                            <p:childTnLst>
+                              <p:set>
+                                <p:cBhvr>
+                                  <p:cTn id="26" dur="1" fill="hold">
+                                    <p:stCondLst>
+                                      <p:cond delay="0"/>
+                                    </p:stCondLst>
+                                  </p:cTn>
+                                  <p:tgtEl>
+                                    <p:spTgt spid="16"/>
+                                  </p:tgtEl>
+                                  <p:attrNameLst>
+                                    <p:attrName>style.visibility</p:attrName>
+                                  </p:attrNameLst>
+                                </p:cBhvr>
+                                <p:to>
+                                  <p:strVal val="visible"/>
+                                </p:to>
+                              </p:set>
+                            </p:childTnLst>
+                          </p:cTn>
+                        </p:par>
+                        <p:par>
+                          <p:cTn id="27" presetID="1" presetClass="entr" presetSubtype="0" fill="hold">
+                            <p:stCondLst>
+                              <p:cond delay="0"/>
+                            </p:stCondLst>
+                            <p:childTnLst>
+                              <p:set>
+                                <p:cBhvr>
+                                  <p:cTn id="28" dur="1" fill="hold">
+                                    <p:stCondLst>
+                                      <p:cond delay="0"/>
+                                    </p:stCondLst>
+                                  </p:cTn>
+                                  <p:tgtEl>
+                                    <p:spTgt spid="17"/>
+                                  </p:tgtEl>
+                                  <p:attrNameLst>
+                                    <p:attrName>style.visibility</p:attrName>
+                                  </p:attrNameLst>
+                                </p:cBhvr>
+                                <p:to>
+                                  <p:strVal val="visible"/>
+                                </p:to>
+                              </p:set>
+                            </p:childTnLst>
+                          </p:cTn>
+                        </p:par>
+                        <p:par>
+                          <p:cTn id="29" presetID="1" presetClass="entr" presetSubtype="0" fill="hold">
+                            <p:stCondLst>
+                              <p:cond delay="0"/>
+                            </p:stCondLst>
+                            <p:childTnLst>
+                              <p:set>
+                                <p:cBhvr>
+                                  <p:cTn id="30" dur="1" fill="hold">
+                                    <p:stCondLst>
+                                      <p:cond delay="0"/>
+                                    </p:stCondLst>
+                                  </p:cTn>
+                                  <p:tgtEl>
+                                    <p:spTgt spid="18"/>
+                                  </p:tgtEl>
+                                  <p:attrNameLst>
+                                    <p:attrName>style.visibility</p:attrName>
+                                  </p:attrNameLst>
+                                </p:cBhvr>
+                                <p:to>
+                                  <p:strVal val="visible"/>
+                                </p:to>
+                              </p:set>
+                            </p:childTnLst>
+                          </p:cTn>
+                        </p:par>
+                      </p:childTnLst>
+                    </p:cTn>
+                  </p:par>
+                </p:childTnLst>
+              </p:cTn>
+              <p:prevCondLst>
+                <p:cond evt="onPrev" delay="0">
+                  <p:tgtEl>
+                    <p:sldTgt/>
+                  </p:tgtEl>
+                </p:cond>
+              </p:prevCondLst>
+              <p:nextCondLst>
+                <p:cond evt="onNext" delay="0">
+                  <p:tgtEl>
+                    <p:sldTgt/>
+                  </p:tgtEl>
+                </p:cond>
+              </p:nextCondLst>
+            </p:seq>
+          </p:childTnLst>
+        </p:cTn>
+      </p:par>
+    </p:tnLst>
+  </p:timing>
   <p:transition spd="med">
     <p:wipe/>
   </p:transition>
@@ -5920,7 +6962,7 @@
                 </a:solidFill>
                 <a:latin typeface="Arial"/>
               </a:rPr>
-              <a:t>  LỚP 8 • LUYỆN TẬP</a:t>
+              <a:t>  LỚP 8 • THỬ THÁCH</a:t>
             </a:r>
           </a:p>
         </p:txBody>
@@ -5955,21 +6997,107 @@
                 </a:solidFill>
                 <a:latin typeface="Arial"/>
               </a:rPr>
-              <a:t>Thảo luận: Tương lai?</a:t>
-            </a:r>
-          </a:p>
-        </p:txBody>
-      </p:sp>
-      <p:sp>
-        <p:nvSpPr>
-          <p:cNvPr id="6" name="TextBox 5"/>
+              <a:t>Thảo luận tương lai AI</a:t>
+            </a:r>
+          </a:p>
+        </p:txBody>
+      </p:sp>
+      <p:sp>
+        <p:nvSpPr>
+          <p:cNvPr id="6" name="Rounded Rectangle 5"/>
+          <p:cNvSpPr/>
+          <p:nvPr/>
+        </p:nvSpPr>
+        <p:spPr>
+          <a:xfrm>
+            <a:off x="365760" y="2286000"/>
+            <a:ext cx="6400800" cy="3383279"/>
+          </a:xfrm>
+          <a:prstGeom prst="roundRect">
+            <a:avLst/>
+          </a:prstGeom>
+          <a:solidFill>
+            <a:srgbClr val="FFFFFF"/>
+          </a:solidFill>
+          <a:ln>
+            <a:noFill/>
+          </a:ln>
+        </p:spPr>
+        <p:style>
+          <a:lnRef idx="1">
+            <a:schemeClr val="accent1"/>
+          </a:lnRef>
+          <a:fillRef idx="3">
+            <a:schemeClr val="accent1"/>
+          </a:fillRef>
+          <a:effectRef idx="2">
+            <a:schemeClr val="accent1"/>
+          </a:effectRef>
+          <a:fontRef idx="minor">
+            <a:schemeClr val="lt1"/>
+          </a:fontRef>
+        </p:style>
+        <p:txBody>
+          <a:bodyPr rtlCol="0" anchor="ctr"/>
+          <a:lstStyle/>
+          <a:p>
+            <a:pPr algn="ctr"/>
+          </a:p>
+        </p:txBody>
+      </p:sp>
+      <p:sp>
+        <p:nvSpPr>
+          <p:cNvPr id="7" name="Rectangle 6"/>
+          <p:cNvSpPr/>
+          <p:nvPr/>
+        </p:nvSpPr>
+        <p:spPr>
+          <a:xfrm>
+            <a:off x="365760" y="2286000"/>
+            <a:ext cx="109728" cy="3383279"/>
+          </a:xfrm>
+          <a:prstGeom prst="rect">
+            <a:avLst/>
+          </a:prstGeom>
+          <a:solidFill>
+            <a:srgbClr val="F59E0B"/>
+          </a:solidFill>
+          <a:ln>
+            <a:noFill/>
+          </a:ln>
+        </p:spPr>
+        <p:style>
+          <a:lnRef idx="1">
+            <a:schemeClr val="accent1"/>
+          </a:lnRef>
+          <a:fillRef idx="3">
+            <a:schemeClr val="accent1"/>
+          </a:fillRef>
+          <a:effectRef idx="2">
+            <a:schemeClr val="accent1"/>
+          </a:effectRef>
+          <a:fontRef idx="minor">
+            <a:schemeClr val="lt1"/>
+          </a:fontRef>
+        </p:style>
+        <p:txBody>
+          <a:bodyPr rtlCol="0" anchor="ctr"/>
+          <a:lstStyle/>
+          <a:p>
+            <a:pPr algn="ctr"/>
+          </a:p>
+        </p:txBody>
+      </p:sp>
+      <p:sp>
+        <p:nvSpPr>
+          <p:cNvPr id="8" name="TextBox 7"/>
           <p:cNvSpPr txBox="1"/>
           <p:nvPr/>
         </p:nvSpPr>
         <p:spPr>
           <a:xfrm>
-            <a:off x="457200" y="2286000"/>
-            <a:ext cx="11274552" cy="822960"/>
+            <a:off x="731520" y="2468880"/>
+            <a:ext cx="5852160" cy="3017520"/>
           </a:xfrm>
           <a:prstGeom prst="rect">
             <a:avLst/>
@@ -5988,120 +7116,48 @@
               </a:spcAft>
             </a:pPr>
             <a:r>
-              <a:rPr sz="1700" b="0">
+              <a:rPr sz="2000" b="0">
                 <a:solidFill>
-                  <a:srgbClr val="78350F"/>
+                  <a:srgbClr val="451A03"/>
                 </a:solidFill>
                 <a:latin typeface="Arial"/>
               </a:rPr>
-              <a:t>Nhóm 4 em, thảo luận (5 phút):</a:t>
-            </a:r>
-          </a:p>
-          <a:p>
-            <a:pPr algn="l">
-              <a:spcAft>
-                <a:spcPts val="600"/>
-              </a:spcAft>
-            </a:pPr>
-            <a:r>
-              <a:rPr sz="1700" b="0">
-                <a:solidFill>
-                  <a:srgbClr val="78350F"/>
-                </a:solidFill>
-                <a:latin typeface="Arial"/>
-              </a:rPr>
-              <a:t/>
-            </a:r>
-          </a:p>
-          <a:p>
-            <a:pPr algn="l">
-              <a:spcAft>
-                <a:spcPts val="600"/>
-              </a:spcAft>
-            </a:pPr>
-            <a:r>
-              <a:rPr sz="1700" b="0">
-                <a:solidFill>
-                  <a:srgbClr val="78350F"/>
-                </a:solidFill>
-                <a:latin typeface="Arial"/>
-              </a:rPr>
-              <a:t>"Máy tính thế hệ 5 (AI) sẽ thay đổi</a:t>
-            </a:r>
-          </a:p>
-          <a:p>
-            <a:pPr algn="l">
-              <a:spcAft>
-                <a:spcPts val="600"/>
-              </a:spcAft>
-            </a:pPr>
-            <a:r>
-              <a:rPr sz="1700" b="0">
-                <a:solidFill>
-                  <a:srgbClr val="78350F"/>
-                </a:solidFill>
-                <a:latin typeface="Arial"/>
-              </a:rPr>
-              <a:t>cuộc sống như thế nào?</a:t>
-            </a:r>
-          </a:p>
-          <a:p>
-            <a:pPr algn="l">
-              <a:spcAft>
-                <a:spcPts val="600"/>
-              </a:spcAft>
-            </a:pPr>
-            <a:r>
-              <a:rPr sz="1700" b="0">
-                <a:solidFill>
-                  <a:srgbClr val="78350F"/>
-                </a:solidFill>
-                <a:latin typeface="Arial"/>
-              </a:rPr>
-              <a:t>Em nghĩ 20 năm nữa máy tính sẽ ra sao?"</a:t>
-            </a:r>
-          </a:p>
-          <a:p>
-            <a:pPr algn="l">
-              <a:spcAft>
-                <a:spcPts val="600"/>
-              </a:spcAft>
-            </a:pPr>
-            <a:r>
-              <a:rPr sz="1700" b="0">
-                <a:solidFill>
-                  <a:srgbClr val="78350F"/>
-                </a:solidFill>
-                <a:latin typeface="Arial"/>
-              </a:rPr>
-              <a:t/>
-            </a:r>
-          </a:p>
-          <a:p>
-            <a:pPr algn="l">
-              <a:spcAft>
-                <a:spcPts val="600"/>
-              </a:spcAft>
-            </a:pPr>
-            <a:r>
-              <a:rPr sz="1700" b="0">
-                <a:solidFill>
-                  <a:srgbClr val="78350F"/>
-                </a:solidFill>
-                <a:latin typeface="Arial"/>
-              </a:rPr>
-              <a:t>Trình bày 2 phút/nhóm</a:t>
-            </a:r>
-          </a:p>
-        </p:txBody>
-      </p:sp>
+              <a:t>Thảo luận nhóm 4 học sinh (5 phút):</a:t>
+            </a:r>
+          </a:p>
+        </p:txBody>
+      </p:sp>
+      <p:pic>
+        <p:nvPicPr>
+          <p:cNvPr id="9" name="Picture 8" descr="bai1_page10.png"/>
+          <p:cNvPicPr>
+            <a:picLocks noChangeAspect="1"/>
+          </p:cNvPicPr>
+          <p:nvPr/>
+        </p:nvPicPr>
+        <p:blipFill>
+          <a:blip r:embed="rId2"/>
+          <a:stretch>
+            <a:fillRect/>
+          </a:stretch>
+        </p:blipFill>
+        <p:spPr>
+          <a:xfrm>
+            <a:off x="7132320" y="2377440"/>
+            <a:ext cx="4572000" cy="3200399"/>
+          </a:xfrm>
+          <a:prstGeom prst="rect">
+            <a:avLst/>
+          </a:prstGeom>
+        </p:spPr>
+      </p:pic>
     </p:spTree>
   </p:cSld>
   <p:clrMapOvr>
     <a:masterClrMapping/>
   </p:clrMapOvr>
   <p:transition spd="med">
-    <p:wipe/>
+    <p:cover/>
   </p:transition>
 </p:sld>
 </file>
@@ -6417,8 +7473,8 @@
         </p:nvSpPr>
         <p:spPr>
           <a:xfrm>
-            <a:off x="1371600" y="2377440"/>
-            <a:ext cx="9445752" cy="457200"/>
+            <a:off x="1371600" y="2423160"/>
+            <a:ext cx="9445752" cy="365760"/>
           </a:xfrm>
           <a:prstGeom prst="rect">
             <a:avLst/>
@@ -6439,7 +7495,7 @@
                 </a:solidFill>
                 <a:latin typeface="Arial"/>
               </a:rPr>
-              <a:t>Công cụ tính toán phát triển hàng nghìn năm</a:t>
+              <a:t>Lịch sử tính toán trải qua hàng nghìn năm phát triển</a:t>
             </a:r>
           </a:p>
         </p:txBody>
@@ -6452,8 +7508,8 @@
         </p:nvSpPr>
         <p:spPr>
           <a:xfrm>
-            <a:off x="914400" y="3200400"/>
-            <a:ext cx="73152" cy="640080"/>
+            <a:off x="914400" y="3291840"/>
+            <a:ext cx="73152" cy="640079"/>
           </a:xfrm>
           <a:prstGeom prst="rect">
             <a:avLst/>
@@ -6495,8 +7551,8 @@
         </p:nvSpPr>
         <p:spPr>
           <a:xfrm>
-            <a:off x="1097280" y="3200400"/>
-            <a:ext cx="9994392" cy="640080"/>
+            <a:off x="1097280" y="3291840"/>
+            <a:ext cx="9994392" cy="640079"/>
           </a:xfrm>
           <a:prstGeom prst="roundRect">
             <a:avLst/>
@@ -6538,8 +7594,8 @@
         </p:nvSpPr>
         <p:spPr>
           <a:xfrm>
-            <a:off x="1371600" y="3291840"/>
-            <a:ext cx="9445752" cy="457200"/>
+            <a:off x="1371600" y="3429000"/>
+            <a:ext cx="9445752" cy="365760"/>
           </a:xfrm>
           <a:prstGeom prst="rect">
             <a:avLst/>
@@ -6560,7 +7616,7 @@
                 </a:solidFill>
                 <a:latin typeface="Arial"/>
               </a:rPr>
-              <a:t>5 thế hệ: Đèn CK → Transistor → IC → Vi xử lý → AI</a:t>
+              <a:t>5 thế hệ: Đèn chân không -&gt; Transistor -&gt; IC -&gt; Vi xử lý -&gt; AI</a:t>
             </a:r>
           </a:p>
         </p:txBody>
@@ -6573,7 +7629,7 @@
         </p:nvSpPr>
         <p:spPr>
           <a:xfrm>
-            <a:off x="914400" y="4114800"/>
+            <a:off x="914400" y="4297680"/>
             <a:ext cx="73152" cy="640080"/>
           </a:xfrm>
           <a:prstGeom prst="rect">
@@ -6616,7 +7672,7 @@
         </p:nvSpPr>
         <p:spPr>
           <a:xfrm>
-            <a:off x="1097280" y="4114800"/>
+            <a:off x="1097280" y="4297680"/>
             <a:ext cx="9994392" cy="640080"/>
           </a:xfrm>
           <a:prstGeom prst="roundRect">
@@ -6659,8 +7715,8 @@
         </p:nvSpPr>
         <p:spPr>
           <a:xfrm>
-            <a:off x="1371600" y="4206240"/>
-            <a:ext cx="9445752" cy="457200"/>
+            <a:off x="1371600" y="4434840"/>
+            <a:ext cx="9445752" cy="365760"/>
           </a:xfrm>
           <a:prstGeom prst="rect">
             <a:avLst/>
@@ -6681,7 +7737,7 @@
                 </a:solidFill>
                 <a:latin typeface="Arial"/>
               </a:rPr>
-              <a:t>Xu hướng: nhỏ hơn, nhanh hơn, thông minh hơn</a:t>
+              <a:t>Xu hướng: Nhỏ gọn hơn, Nhanh hơn, Thông minh hơn</a:t>
             </a:r>
           </a:p>
         </p:txBody>
@@ -6758,7 +7814,7 @@
         </p:nvSpPr>
         <p:spPr>
           <a:xfrm>
-            <a:off x="914400" y="1508760"/>
+            <a:off x="914400" y="1783080"/>
             <a:ext cx="10360152" cy="1097280"/>
           </a:xfrm>
           <a:prstGeom prst="rect">
@@ -6793,8 +7849,8 @@
         </p:nvSpPr>
         <p:spPr>
           <a:xfrm>
-            <a:off x="2436876" y="3063240"/>
-            <a:ext cx="7315200" cy="2285999"/>
+            <a:off x="2436876" y="3337560"/>
+            <a:ext cx="7315200" cy="1828800"/>
           </a:xfrm>
           <a:prstGeom prst="roundRect">
             <a:avLst/>
@@ -6836,8 +7892,8 @@
         </p:nvSpPr>
         <p:spPr>
           <a:xfrm>
-            <a:off x="2894076" y="3337560"/>
-            <a:ext cx="6400800" cy="1737360"/>
+            <a:off x="2894076" y="3611879"/>
+            <a:ext cx="6400800" cy="1280160"/>
           </a:xfrm>
           <a:prstGeom prst="rect">
             <a:avLst/>
@@ -6856,13 +7912,13 @@
               </a:spcAft>
             </a:pPr>
             <a:r>
-              <a:rPr sz="1800" b="0">
+              <a:rPr sz="2000" b="0">
                 <a:solidFill>
                   <a:srgbClr val="451A03"/>
                 </a:solidFill>
                 <a:latin typeface="Arial"/>
               </a:rPr>
-              <a:t>BTVN: Vẽ dòng thời gian</a:t>
+              <a:t>BTVN: Vẽ dòng thời gian 5 mốc quan trọng</a:t>
             </a:r>
           </a:p>
           <a:p>
@@ -6872,29 +7928,13 @@
               </a:spcAft>
             </a:pPr>
             <a:r>
-              <a:rPr sz="1800" b="0">
+              <a:rPr sz="2000" b="0">
                 <a:solidFill>
                   <a:srgbClr val="451A03"/>
                 </a:solidFill>
                 <a:latin typeface="Arial"/>
               </a:rPr>
-              <a:t>5 mốc lịch sử quan trọng nhất</a:t>
-            </a:r>
-          </a:p>
-          <a:p>
-            <a:pPr algn="ctr">
-              <a:spcAft>
-                <a:spcPts val="600"/>
-              </a:spcAft>
-            </a:pPr>
-            <a:r>
-              <a:rPr sz="1800" b="0">
-                <a:solidFill>
-                  <a:srgbClr val="451A03"/>
-                </a:solidFill>
-                <a:latin typeface="Arial"/>
-              </a:rPr>
-              <a:t>của công cụ tính toán.</a:t>
+              <a:t>trong lịch sử công cụ tính toán!</a:t>
             </a:r>
           </a:p>
         </p:txBody>

--- a/KHBD_Tin_học/Lớp_8/Tuần_02/Slide_Tin_hoc_Lop_8_Bai01_Luoc_su_cong_cu_tinh_toan.pptx
+++ b/KHBD_Tin_học/Lớp_8/Tuần_02/Slide_Tin_hoc_Lop_8_Bai01_Luoc_su_cong_cu_tinh_toan.pptx
@@ -3553,7 +3553,7 @@
       </p:sp>
       <p:pic>
         <p:nvPicPr>
-          <p:cNvPr id="6" name="Picture 5" descr="bai1_page10.png"/>
+          <p:cNvPr id="6" name="Picture 5" descr="cover_lop8.jpg"/>
           <p:cNvPicPr>
             <a:picLocks noChangeAspect="1"/>
           </p:cNvPicPr>
@@ -3927,7 +3927,7 @@
       </p:sp>
       <p:pic>
         <p:nvPicPr>
-          <p:cNvPr id="9" name="Picture 8" descr="bai1_page10.png"/>
+          <p:cNvPr id="9" name="Picture 8" descr="warmup_lop8.jpg"/>
           <p:cNvPicPr>
             <a:picLocks noChangeAspect="1"/>
           </p:cNvPicPr>
@@ -4216,7 +4216,7 @@
       </p:sp>
       <p:pic>
         <p:nvPicPr>
-          <p:cNvPr id="8" name="Picture 7" descr="bai1_page10.png"/>
+          <p:cNvPr id="8" name="Picture 7" descr="learn1_lop8.jpg"/>
           <p:cNvPicPr>
             <a:picLocks noChangeAspect="1"/>
           </p:cNvPicPr>
@@ -4363,7 +4363,7 @@
       </p:sp>
       <p:pic>
         <p:nvPicPr>
-          <p:cNvPr id="12" name="Picture 11" descr="bai1_page11.png"/>
+          <p:cNvPr id="12" name="Picture 11" descr="learn2_lop8.jpg"/>
           <p:cNvPicPr>
             <a:picLocks noChangeAspect="1"/>
           </p:cNvPicPr>
@@ -4510,7 +4510,7 @@
       </p:sp>
       <p:pic>
         <p:nvPicPr>
-          <p:cNvPr id="16" name="Picture 15" descr="bai1_page12.png"/>
+          <p:cNvPr id="16" name="Picture 15" descr="learn3_lop8.jpg"/>
           <p:cNvPicPr>
             <a:picLocks noChangeAspect="1"/>
           </p:cNvPicPr>
@@ -4834,7 +4834,7 @@
       </p:sp>
       <p:pic>
         <p:nvPicPr>
-          <p:cNvPr id="8" name="Picture 7" descr="bai1_page13.png"/>
+          <p:cNvPr id="8" name="Picture 7" descr="learn2_lop8.jpg"/>
           <p:cNvPicPr>
             <a:picLocks noChangeAspect="1"/>
           </p:cNvPicPr>
@@ -4981,7 +4981,7 @@
       </p:sp>
       <p:pic>
         <p:nvPicPr>
-          <p:cNvPr id="12" name="Picture 11" descr="bai1_page5.png"/>
+          <p:cNvPr id="12" name="Picture 11" descr="learn3_lop8.jpg"/>
           <p:cNvPicPr>
             <a:picLocks noChangeAspect="1"/>
           </p:cNvPicPr>
@@ -5128,7 +5128,7 @@
       </p:sp>
       <p:pic>
         <p:nvPicPr>
-          <p:cNvPr id="16" name="Picture 15" descr="bai1_page6.png"/>
+          <p:cNvPr id="16" name="Picture 15" descr="warmup_lop8.jpg"/>
           <p:cNvPicPr>
             <a:picLocks noChangeAspect="1"/>
           </p:cNvPicPr>
@@ -5452,7 +5452,7 @@
       </p:sp>
       <p:pic>
         <p:nvPicPr>
-          <p:cNvPr id="8" name="Picture 7" descr="bai1_page7.png"/>
+          <p:cNvPr id="8" name="Picture 7" descr="activity_lop8.jpg"/>
           <p:cNvPicPr>
             <a:picLocks noChangeAspect="1"/>
           </p:cNvPicPr>
@@ -5599,7 +5599,7 @@
       </p:sp>
       <p:pic>
         <p:nvPicPr>
-          <p:cNvPr id="12" name="Picture 11" descr="bai1_page8.png"/>
+          <p:cNvPr id="12" name="Picture 11" descr="cover_lop8.jpg"/>
           <p:cNvPicPr>
             <a:picLocks noChangeAspect="1"/>
           </p:cNvPicPr>
@@ -5746,7 +5746,7 @@
       </p:sp>
       <p:pic>
         <p:nvPicPr>
-          <p:cNvPr id="16" name="Picture 15" descr="bai1_page9.png"/>
+          <p:cNvPr id="16" name="Picture 15" descr="learn1_lop8.jpg"/>
           <p:cNvPicPr>
             <a:picLocks noChangeAspect="1"/>
           </p:cNvPicPr>
@@ -6066,7 +6066,7 @@
       </p:sp>
       <p:pic>
         <p:nvPicPr>
-          <p:cNvPr id="8" name="Picture 7" descr="bai1_page10.png"/>
+          <p:cNvPr id="8" name="Picture 7" descr="activity_lop8.jpg"/>
           <p:cNvPicPr>
             <a:picLocks noChangeAspect="1"/>
           </p:cNvPicPr>
@@ -6170,7 +6170,7 @@
       </p:sp>
       <p:pic>
         <p:nvPicPr>
-          <p:cNvPr id="11" name="Picture 10" descr="bai1_page11.png"/>
+          <p:cNvPr id="11" name="Picture 10" descr="cover_lop8.jpg"/>
           <p:cNvPicPr>
             <a:picLocks noChangeAspect="1"/>
           </p:cNvPicPr>
@@ -6274,7 +6274,7 @@
       </p:sp>
       <p:pic>
         <p:nvPicPr>
-          <p:cNvPr id="14" name="Picture 13" descr="bai1_page12.png"/>
+          <p:cNvPr id="14" name="Picture 13" descr="learn1_lop8.jpg"/>
           <p:cNvPicPr>
             <a:picLocks noChangeAspect="1"/>
           </p:cNvPicPr>
@@ -6378,7 +6378,7 @@
       </p:sp>
       <p:pic>
         <p:nvPicPr>
-          <p:cNvPr id="17" name="Picture 16" descr="bai1_page13.png"/>
+          <p:cNvPr id="17" name="Picture 16" descr="learn2_lop8.jpg"/>
           <p:cNvPicPr>
             <a:picLocks noChangeAspect="1"/>
           </p:cNvPicPr>
@@ -7129,7 +7129,7 @@
       </p:sp>
       <p:pic>
         <p:nvPicPr>
-          <p:cNvPr id="9" name="Picture 8" descr="bai1_page10.png"/>
+          <p:cNvPr id="9" name="Picture 8" descr="activity_lop8.jpg"/>
           <p:cNvPicPr>
             <a:picLocks noChangeAspect="1"/>
           </p:cNvPicPr>
